--- a/docs/content/final_project/final_project_lecture.pptx
+++ b/docs/content/final_project/final_project_lecture.pptx
@@ -20,6 +20,9 @@
     <p:sldId id="268" r:id="rId14"/>
     <p:sldId id="269" r:id="rId15"/>
     <p:sldId id="270" r:id="rId16"/>
+    <p:sldId id="271" r:id="rId17"/>
+    <p:sldId id="272" r:id="rId18"/>
+    <p:sldId id="273" r:id="rId19"/>
   </p:sldIdLst>
   <p:sldSz cx="9144000" cy="5143500" type="screen16x9"/>
   <p:notesSz cx="6858000" cy="9144000"/>
@@ -3293,7 +3296,7 @@
             </a:pPr>
             <a:r>
               <a:rPr/>
-              <a:t>Lecture 08 — Find Your Own Data</a:t>
+              <a:t>Lecture 15 — Your Final Project Starts Now</a:t>
             </a:r>
           </a:p>
         </p:txBody>
@@ -3323,7 +3326,7 @@
             </a:pPr>
             <a:r>
               <a:rPr/>
-              <a:t>Browse real data sources, load a candidate in R, and draft your Milestone 1</a:t>
+              <a:t>Finding real data, asking a real question, and building toward a real answer</a:t>
             </a:r>
             <a:br/>
             <a:br/>
@@ -3354,7 +3357,7 @@
             </a:pPr>
             <a:r>
               <a:rPr/>
-              <a:t>2026-07-05</a:t>
+              <a:t>2026-08-27</a:t>
             </a:r>
           </a:p>
         </p:txBody>
@@ -3394,8 +3397,11 @@
         <p:spPr>
           <a:xfrm>
             <a:off x="0" y="0"/>
-            <a:ext cx="9144000" cy="582780"/>
+            <a:ext cx="9144000" cy="602780"/>
           </a:xfrm>
+          <a:solidFill>
+            <a:srgbClr val="1A1A2E"/>
+          </a:solidFill>
         </p:spPr>
         <p:txBody>
           <a:bodyPr/>
@@ -3406,7 +3412,7 @@
             </a:pPr>
             <a:r>
               <a:rPr/>
-              <a:t>Part 8 · Draft your Milestone 1 paragraph</a:t>
+              <a:t>Data Sources: Fun and Engaging 👽🦶☕</a:t>
             </a:r>
           </a:p>
         </p:txBody>
@@ -3418,7 +3424,7 @@
             <a:spLocks noGrp="1"/>
           </p:cNvSpPr>
           <p:nvPr>
-            <p:ph idx="1"/>
+            <p:ph idx="1" sz="half"/>
           </p:nvPr>
         </p:nvSpPr>
         <p:spPr/>
@@ -3430,52 +3436,209 @@
               <a:buNone/>
             </a:pPr>
             <a:r>
-              <a:rPr/>
-              <a:t>Put it all together. Copy the template and fill in the blanks from Parts 3–7.</a:t>
-            </a:r>
-          </a:p>
-          <a:p>
-            <a:pPr lvl="0" indent="0">
-              <a:buNone/>
-            </a:pPr>
+              <a:rPr b="1"/>
+              <a:t>These are popular with students and very workable statistically:</a:t>
+            </a:r>
+          </a:p>
+          <a:p>
+            <a:pPr lvl="0"/>
+            <a:r>
+              <a:rPr/>
+              <a:t>👣 </a:t>
+            </a:r>
+            <a:r>
+              <a:rPr b="1"/>
+              <a:t>Bigfoot / BFRO Sightings</a:t>
+            </a:r>
+            <a:br/>
+            <a:r>
+              <a:rPr/>
+              <a:t>~5,000 reports with date, state, season, classification (A/B/C), weather</a:t>
+            </a:r>
+            <a:br/>
             <a:r>
               <a:rPr>
                 <a:latin typeface="Courier"/>
               </a:rPr>
-              <a:t>"I plan to use the __________ dataset, available at __________.
-It contains approximately ____ rows and ____ columns. My predictor (X)
-is __________ and my response (Y) is __________. My research question is:
-__________. My null hypothesis is that __________, and my alternate
-hypothesis is that __________. I plan to use __________ to test this.
-I have confirmed I can load the file into R with read_csv()."</a:t>
-            </a:r>
-          </a:p>
-          <a:p>
-            <a:pPr lvl="0" indent="0" marL="0">
-              <a:buNone/>
-            </a:pPr>
-            <a:r>
-              <a:rPr/>
-              <a:t>✏️ </a:t>
-            </a:r>
-            <a:r>
-              <a:rPr b="1"/>
-              <a:t>Your turn:</a:t>
-            </a:r>
-            <a:r>
-              <a:rPr/>
-              <a:t> Write your final paragraph here, then submit it to Canvas.</a:t>
-            </a:r>
-          </a:p>
-          <a:p>
-            <a:pPr lvl="0" indent="0">
-              <a:buNone/>
-            </a:pPr>
+              <a:t>kaggle.com/datasets/mexwell/bigfoot-sightings</a:t>
+            </a:r>
+            <a:br/>
+            <a:r>
+              <a:rPr i="1"/>
+              <a:t>ANOVA on sightings by season; regression of count on year; t-test by class type</a:t>
+            </a:r>
+          </a:p>
+          <a:p>
+            <a:pPr lvl="0"/>
+            <a:r>
+              <a:rPr/>
+              <a:t>👽 </a:t>
+            </a:r>
+            <a:r>
+              <a:rPr b="1"/>
+              <a:t>UFO Sightings — NUFORC</a:t>
+            </a:r>
+            <a:br/>
+            <a:r>
+              <a:rPr/>
+              <a:t>88,000+ reports with date, location, shape, duration</a:t>
+            </a:r>
+            <a:br/>
             <a:r>
               <a:rPr>
                 <a:latin typeface="Courier"/>
               </a:rPr>
-              <a:t>Your Milestone 1 paragraph:</a:t>
+              <a:t>kaggle.com/datasets/joebeachcapital/ufo-sightings</a:t>
+            </a:r>
+            <a:br/>
+            <a:r>
+              <a:rPr i="1"/>
+              <a:t>How has sighting frequency changed over time? Does duration differ by shape?</a:t>
+            </a:r>
+          </a:p>
+          <a:p>
+            <a:pPr lvl="0"/>
+            <a:r>
+              <a:rPr/>
+              <a:t>☕ </a:t>
+            </a:r>
+            <a:r>
+              <a:rPr b="1"/>
+              <a:t>Coffee Reviews</a:t>
+            </a:r>
+            <a:br/>
+            <a:r>
+              <a:rPr/>
+              <a:t>Cupped coffee scores, country of origin, altitude, processing method</a:t>
+            </a:r>
+            <a:br/>
+            <a:r>
+              <a:rPr>
+                <a:latin typeface="Courier"/>
+              </a:rPr>
+              <a:t>kaggle.com</a:t>
+            </a:r>
+            <a:r>
+              <a:rPr/>
+              <a:t> — search “coffee quality dataset”</a:t>
+            </a:r>
+            <a:br/>
+            <a:r>
+              <a:rPr i="1"/>
+              <a:t>Does altitude predict quality score? Does processing method matter (ANOVA)?</a:t>
+            </a:r>
+          </a:p>
+          <a:p>
+            <a:pPr lvl="0"/>
+            <a:r>
+              <a:rPr/>
+              <a:t>🎮 </a:t>
+            </a:r>
+            <a:r>
+              <a:rPr b="1"/>
+              <a:t>Video Game Sales</a:t>
+            </a:r>
+            <a:br/>
+            <a:r>
+              <a:rPr/>
+              <a:t>Sales figures by platform, genre, region, year — 16,000 titles</a:t>
+            </a:r>
+            <a:br/>
+            <a:r>
+              <a:rPr>
+                <a:latin typeface="Courier"/>
+              </a:rPr>
+              <a:t>kaggle.com</a:t>
+            </a:r>
+            <a:r>
+              <a:rPr/>
+              <a:t> — search “video game sales”</a:t>
+            </a:r>
+            <a:br/>
+            <a:r>
+              <a:rPr i="1"/>
+              <a:t>Does genre predict sales? Has the platform landscape shifted over time?</a:t>
+            </a:r>
+          </a:p>
+        </p:txBody>
+      </p:sp>
+      <p:sp>
+        <p:nvSpPr>
+          <p:cNvPr id="4" name="Content Placeholder 3"/>
+          <p:cNvSpPr>
+            <a:spLocks noGrp="1"/>
+          </p:cNvSpPr>
+          <p:nvPr>
+            <p:ph idx="2" sz="half"/>
+          </p:nvPr>
+        </p:nvSpPr>
+        <p:spPr/>
+        <p:txBody>
+          <a:bodyPr/>
+          <a:lstStyle/>
+          <a:p>
+            <a:pPr lvl="0" indent="0" marL="0">
+              <a:buNone/>
+            </a:pPr>
+            <a:r>
+              <a:rPr b="1"/>
+              <a:t>Why these work for this course:</a:t>
+            </a:r>
+          </a:p>
+          <a:p>
+            <a:pPr lvl="0"/>
+            <a:r>
+              <a:rPr/>
+              <a:t>Clean enough to load with </a:t>
+            </a:r>
+            <a:r>
+              <a:rPr>
+                <a:latin typeface="Courier"/>
+              </a:rPr>
+              <a:t>read_csv()</a:t>
+            </a:r>
+            <a:r>
+              <a:rPr/>
+              <a:t> directly</a:t>
+            </a:r>
+          </a:p>
+          <a:p>
+            <a:pPr lvl="0"/>
+            <a:r>
+              <a:rPr/>
+              <a:t>Have clear categorical and numeric variables</a:t>
+            </a:r>
+          </a:p>
+          <a:p>
+            <a:pPr lvl="0"/>
+            <a:r>
+              <a:rPr/>
+              <a:t>Produce obvious testable hypotheses</a:t>
+            </a:r>
+          </a:p>
+          <a:p>
+            <a:pPr lvl="0"/>
+            <a:r>
+              <a:rPr/>
+              <a:t>Students actually want to look at the results</a:t>
+            </a:r>
+          </a:p>
+          <a:p>
+            <a:pPr lvl="0" indent="0" marL="1270000">
+              <a:buNone/>
+            </a:pPr>
+            <a:r>
+              <a:rPr sz="2000" b="1"/>
+              <a:t>Note</a:t>
+            </a:r>
+          </a:p>
+          <a:p>
+            <a:pPr lvl="0" indent="0" marL="1270000">
+              <a:buNone/>
+            </a:pPr>
+            <a:r>
+              <a:rPr sz="2000"/>
+              <a:t>You don’t have to study biology to do a biology data science course project. The methods are the same regardless of the data.</a:t>
             </a:r>
           </a:p>
         </p:txBody>
@@ -3515,8 +3678,11 @@
         <p:spPr>
           <a:xfrm>
             <a:off x="0" y="0"/>
-            <a:ext cx="9144000" cy="582780"/>
+            <a:ext cx="9144000" cy="602780"/>
           </a:xfrm>
+          <a:solidFill>
+            <a:srgbClr val="1A1A2E"/>
+          </a:solidFill>
         </p:spPr>
         <p:txBody>
           <a:bodyPr/>
@@ -3527,7 +3693,7 @@
             </a:pPr>
             <a:r>
               <a:rPr/>
-              <a:t>Part 9 · Plan the short presentation</a:t>
+              <a:t>Data Sources: General and Exploratory</a:t>
             </a:r>
           </a:p>
         </p:txBody>
@@ -3539,7 +3705,7 @@
             <a:spLocks noGrp="1"/>
           </p:cNvSpPr>
           <p:nvPr>
-            <p:ph idx="1"/>
+            <p:ph idx="1" sz="half"/>
           </p:nvPr>
         </p:nvSpPr>
         <p:spPr/>
@@ -3547,39 +3713,224 @@
           <a:bodyPr/>
           <a:lstStyle/>
           <a:p>
-            <a:pPr lvl="0" indent="0" marL="0">
-              <a:buNone/>
-            </a:pPr>
-            <a:r>
-              <a:rPr/>
-              <a:t>Your M5 talk is five minutes, one story. Rough it out now while the dataset is fresh.</a:t>
-            </a:r>
-          </a:p>
-          <a:p>
-            <a:pPr lvl="0" indent="0" marL="0">
-              <a:buNone/>
-            </a:pPr>
-            <a:r>
-              <a:rPr/>
-              <a:t>✏️ </a:t>
-            </a:r>
-            <a:r>
-              <a:rPr b="1"/>
-              <a:t>Your turn:</a:t>
-            </a:r>
-          </a:p>
-          <a:p>
-            <a:pPr lvl="0" indent="0">
-              <a:buNone/>
-            </a:pPr>
+            <a:pPr lvl="0"/>
+            <a:r>
+              <a:rPr/>
+              <a:t>🌍 </a:t>
+            </a:r>
+            <a:r>
+              <a:rPr b="1"/>
+              <a:t>Our World in Data</a:t>
+            </a:r>
+            <a:br/>
+            <a:r>
+              <a:rPr/>
+              <a:t>Country-level indicators: health, climate, economics, education</a:t>
+            </a:r>
+            <a:br/>
             <a:r>
               <a:rPr>
                 <a:latin typeface="Courier"/>
               </a:rPr>
-              <a:t>Slide 1 — the question (and why you care):
-Slide 2 — the data (source, what one row is, how big):
-Slide 3 — the ONE figure that shows your result:
-Slide 4 — the answer in one sentence + one honest caveat:</a:t>
+              <a:t>ourworldindata.org/data</a:t>
+            </a:r>
+            <a:r>
+              <a:rPr/>
+              <a:t> — all downloadable as CSV</a:t>
+            </a:r>
+            <a:br/>
+            <a:r>
+              <a:rPr i="1"/>
+              <a:t>Global trends; great for regression of any indicator over time</a:t>
+            </a:r>
+          </a:p>
+          <a:p>
+            <a:pPr lvl="0"/>
+            <a:r>
+              <a:rPr/>
+              <a:t>📊 </a:t>
+            </a:r>
+            <a:r>
+              <a:rPr b="1"/>
+              <a:t>FiveThirtyEight</a:t>
+            </a:r>
+            <a:br/>
+            <a:r>
+              <a:rPr/>
+              <a:t>Sports, politics, culture — all their story data is public</a:t>
+            </a:r>
+            <a:br/>
+            <a:r>
+              <a:rPr>
+                <a:latin typeface="Courier"/>
+              </a:rPr>
+              <a:t>github.com/fivethirtyeight/data</a:t>
+            </a:r>
+            <a:br/>
+            <a:r>
+              <a:rPr i="1"/>
+              <a:t>Dozens of clean CSVs; each has a published story as inspiration</a:t>
+            </a:r>
+          </a:p>
+          <a:p>
+            <a:pPr lvl="0"/>
+            <a:r>
+              <a:rPr/>
+              <a:t>🏈 </a:t>
+            </a:r>
+            <a:r>
+              <a:rPr b="1"/>
+              <a:t>Sports Reference</a:t>
+            </a:r>
+            <a:br/>
+            <a:r>
+              <a:rPr/>
+              <a:t>Player and team stats for NFL, NBA, MLB, NHL</a:t>
+            </a:r>
+            <a:br/>
+            <a:r>
+              <a:rPr>
+                <a:latin typeface="Courier"/>
+              </a:rPr>
+              <a:t>sports-reference.com</a:t>
+            </a:r>
+            <a:br/>
+            <a:r>
+              <a:rPr i="1"/>
+              <a:t>Does salary predict performance? Regression all day.</a:t>
+            </a:r>
+          </a:p>
+          <a:p>
+            <a:pPr lvl="0"/>
+            <a:r>
+              <a:rPr/>
+              <a:t>🚲 </a:t>
+            </a:r>
+            <a:r>
+              <a:rPr b="1"/>
+              <a:t>Bike Sharing</a:t>
+            </a:r>
+            <a:r>
+              <a:rPr/>
+              <a:t> (UCI ML Repository)</a:t>
+            </a:r>
+            <a:br/>
+            <a:r>
+              <a:rPr/>
+              <a:t>Hourly bike rental counts, weather, season — 17,000 rows</a:t>
+            </a:r>
+            <a:br/>
+            <a:r>
+              <a:rPr>
+                <a:latin typeface="Courier"/>
+              </a:rPr>
+              <a:t>archive.ics.uci.edu</a:t>
+            </a:r>
+            <a:br/>
+            <a:r>
+              <a:rPr i="1"/>
+              <a:t>Regression: does temperature predict rentals? ANOVA across seasons?</a:t>
+            </a:r>
+          </a:p>
+          <a:p>
+            <a:pPr lvl="0"/>
+            <a:r>
+              <a:rPr/>
+              <a:t>🔬 </a:t>
+            </a:r>
+            <a:r>
+              <a:rPr b="1"/>
+              <a:t>Figshare</a:t>
+            </a:r>
+            <a:br/>
+            <a:r>
+              <a:rPr/>
+              <a:t>Research data across all fields — often from published papers</a:t>
+            </a:r>
+            <a:br/>
+            <a:r>
+              <a:rPr>
+                <a:latin typeface="Courier"/>
+              </a:rPr>
+              <a:t>figshare.com</a:t>
+            </a:r>
+          </a:p>
+        </p:txBody>
+      </p:sp>
+      <p:sp>
+        <p:nvSpPr>
+          <p:cNvPr id="4" name="Content Placeholder 3"/>
+          <p:cNvSpPr>
+            <a:spLocks noGrp="1"/>
+          </p:cNvSpPr>
+          <p:nvPr>
+            <p:ph idx="2" sz="half"/>
+          </p:nvPr>
+        </p:nvSpPr>
+        <p:spPr/>
+        <p:txBody>
+          <a:bodyPr/>
+          <a:lstStyle/>
+          <a:p>
+            <a:pPr lvl="0" indent="0" marL="0">
+              <a:buNone/>
+            </a:pPr>
+            <a:r>
+              <a:rPr b="1"/>
+              <a:t>And the one your professor can’t stop you from using:</a:t>
+            </a:r>
+          </a:p>
+          <a:p>
+            <a:pPr lvl="0"/>
+            <a:r>
+              <a:rPr/>
+              <a:t>🏔️ </a:t>
+            </a:r>
+            <a:r>
+              <a:rPr b="1"/>
+              <a:t>Kaggle</a:t>
+            </a:r>
+            <a:r>
+              <a:rPr/>
+              <a:t> — the world’s largest public dataset repository</a:t>
+            </a:r>
+            <a:br/>
+            <a:r>
+              <a:rPr>
+                <a:latin typeface="Courier"/>
+              </a:rPr>
+              <a:t>kaggle.com/datasets</a:t>
+            </a:r>
+            <a:br/>
+            <a:r>
+              <a:rPr/>
+              <a:t>Free account required to download</a:t>
+            </a:r>
+            <a:br/>
+            <a:r>
+              <a:rPr/>
+              <a:t>Filter by: file type → CSV; size → small (under 10 MB to start)</a:t>
+            </a:r>
+          </a:p>
+          <a:p>
+            <a:pPr lvl="0" indent="0" marL="0">
+              <a:buNone/>
+            </a:pPr>
+            <a:r>
+              <a:rPr b="1"/>
+              <a:t>Google Dataset Search:</a:t>
+            </a:r>
+            <a:br/>
+            <a:r>
+              <a:rPr>
+                <a:latin typeface="Courier"/>
+              </a:rPr>
+              <a:t>datasetsearch.research.google.com</a:t>
+            </a:r>
+            <a:br/>
+            <a:r>
+              <a:rPr/>
+              <a:t>Search any topic and find datasets across dozens of repositories at once.</a:t>
             </a:r>
           </a:p>
         </p:txBody>
@@ -3619,8 +3970,11 @@
         <p:spPr>
           <a:xfrm>
             <a:off x="0" y="0"/>
-            <a:ext cx="9144000" cy="582780"/>
+            <a:ext cx="9144000" cy="602780"/>
           </a:xfrm>
+          <a:solidFill>
+            <a:srgbClr val="1A1A2E"/>
+          </a:solidFill>
         </p:spPr>
         <p:txBody>
           <a:bodyPr/>
@@ -3631,7 +3985,7 @@
             </a:pPr>
             <a:r>
               <a:rPr/>
-              <a:t>Part 10 · Checkpoint</a:t>
+              <a:t>What Kind of Question Should You Ask?</a:t>
             </a:r>
           </a:p>
         </p:txBody>
@@ -3643,7 +3997,7 @@
             <a:spLocks noGrp="1"/>
           </p:cNvSpPr>
           <p:nvPr>
-            <p:ph idx="1"/>
+            <p:ph idx="1" sz="half"/>
           </p:nvPr>
         </p:nvSpPr>
         <p:spPr/>
@@ -3656,118 +4010,46 @@
             </a:pPr>
             <a:r>
               <a:rPr/>
-              <a:t>You are ready to submit Milestone 1 when you can check every box:</a:t>
-            </a:r>
-          </a:p>
-          <a:p>
-            <a:pPr lvl="0"/>
-            <a:r>
-              <a:rPr/>
-              <a:t>☐ I downloaded a dataset and it lives in my </a:t>
-            </a:r>
-            <a:r>
-              <a:rPr>
-                <a:latin typeface="Courier"/>
-              </a:rPr>
-              <a:t>data/</a:t>
-            </a:r>
-            <a:r>
-              <a:rPr/>
-              <a:t> folder</a:t>
-            </a:r>
-          </a:p>
-          <a:p>
-            <a:pPr lvl="0"/>
-            <a:r>
-              <a:rPr/>
-              <a:t>☐ </a:t>
-            </a:r>
-            <a:r>
-              <a:rPr>
-                <a:latin typeface="Courier"/>
-              </a:rPr>
-              <a:t>read_csv()</a:t>
-            </a:r>
-            <a:r>
-              <a:rPr/>
-              <a:t> loads it without errors</a:t>
-            </a:r>
-          </a:p>
-          <a:p>
-            <a:pPr lvl="0"/>
-            <a:r>
-              <a:rPr/>
-              <a:t>☐ </a:t>
-            </a:r>
-            <a:r>
-              <a:rPr>
-                <a:latin typeface="Courier"/>
-              </a:rPr>
-              <a:t>dim()</a:t>
-            </a:r>
-            <a:r>
-              <a:rPr/>
-              <a:t> shows at least 50 rows and 3 columns</a:t>
-            </a:r>
-          </a:p>
-          <a:p>
-            <a:pPr lvl="0"/>
-            <a:r>
-              <a:rPr/>
-              <a:t>☐ I named a numeric </a:t>
-            </a:r>
-            <a:r>
-              <a:rPr b="1"/>
-              <a:t>Y</a:t>
-            </a:r>
-            <a:r>
-              <a:rPr/>
-              <a:t> and at least one </a:t>
-            </a:r>
-            <a:r>
-              <a:rPr b="1"/>
-              <a:t>X</a:t>
-            </a:r>
-          </a:p>
-          <a:p>
-            <a:pPr lvl="0"/>
-            <a:r>
-              <a:rPr/>
-              <a:t>☐ I wrote </a:t>
-            </a:r>
-            <a:r>
-              <a:rPr b="1"/>
-              <a:t>H₀ and Hₐ</a:t>
-            </a:r>
-            <a:r>
-              <a:rPr/>
-              <a:t> in one sentence each</a:t>
-            </a:r>
-          </a:p>
-          <a:p>
-            <a:pPr lvl="0"/>
-            <a:r>
-              <a:rPr/>
-              <a:t>☐ I chose a </a:t>
-            </a:r>
-            <a:r>
-              <a:rPr b="1"/>
-              <a:t>method</a:t>
-            </a:r>
-            <a:r>
-              <a:rPr/>
-              <a:t> that fits my variables</a:t>
-            </a:r>
-          </a:p>
-          <a:p>
-            <a:pPr lvl="0"/>
-            <a:r>
-              <a:rPr/>
-              <a:t>☐ I drafted my </a:t>
-            </a:r>
-            <a:r>
-              <a:rPr b="1"/>
-              <a:t>Milestone 1 paragraph</a:t>
+              <a:t>A good project question has three parts:</a:t>
+            </a:r>
+          </a:p>
+          <a:p>
+            <a:pPr lvl="0" indent="-342900" marL="342900">
+              <a:buAutoNum type="arabicPeriod"/>
+            </a:pPr>
+            <a:r>
+              <a:rPr b="1"/>
+              <a:t>A response variable (Y)</a:t>
+            </a:r>
+            <a:r>
+              <a:rPr/>
+              <a:t> — something you can measure or count</a:t>
+            </a:r>
+          </a:p>
+          <a:p>
+            <a:pPr lvl="0" indent="-342900" marL="342900">
+              <a:buAutoNum type="arabicPeriod"/>
+            </a:pPr>
+            <a:r>
+              <a:rPr b="1"/>
+              <a:t>A predictor (X)</a:t>
+            </a:r>
+            <a:r>
+              <a:rPr/>
+              <a:t> — something that might explain Y</a:t>
+            </a:r>
+          </a:p>
+          <a:p>
+            <a:pPr lvl="0" indent="-342900" marL="342900">
+              <a:buAutoNum type="arabicPeriod"/>
+            </a:pPr>
+            <a:r>
+              <a:rPr b="1"/>
+              <a:t>A direction</a:t>
+            </a:r>
+            <a:r>
+              <a:rPr/>
+              <a:t> — does more X lead to more (or less) Y? Or does Y differ across groups?</a:t>
             </a:r>
           </a:p>
           <a:p>
@@ -3775,27 +4057,136 @@
               <a:buNone/>
             </a:pPr>
             <a:r>
-              <a:rPr/>
-              <a:t>✏️ </a:t>
-            </a:r>
-            <a:r>
-              <a:rPr b="1"/>
-              <a:t>Your turn:</a:t>
-            </a:r>
-            <a:r>
-              <a:rPr/>
-              <a:t> Any box unchecked? Note what’s blocking you and bring it to office hours.</a:t>
-            </a:r>
-          </a:p>
-          <a:p>
-            <a:pPr lvl="0" indent="0">
-              <a:buNone/>
-            </a:pPr>
-            <a:r>
-              <a:rPr>
-                <a:latin typeface="Courier"/>
-              </a:rPr>
-              <a:t>What's blocking me (if anything):</a:t>
+              <a:rPr b="1"/>
+              <a:t>Examples of strong questions:</a:t>
+            </a:r>
+          </a:p>
+          <a:p>
+            <a:pPr lvl="0"/>
+            <a:r>
+              <a:rPr/>
+              <a:t>Do Bigfoot sightings in summer outnumber those in winter? </a:t>
+            </a:r>
+            <a:r>
+              <a:rPr i="1"/>
+              <a:t>(ANOVA)</a:t>
+            </a:r>
+          </a:p>
+          <a:p>
+            <a:pPr lvl="0"/>
+            <a:r>
+              <a:rPr/>
+              <a:t>Has the number of UFO sightings increased since the 1990s? </a:t>
+            </a:r>
+            <a:r>
+              <a:rPr i="1"/>
+              <a:t>(regression on year)</a:t>
+            </a:r>
+          </a:p>
+          <a:p>
+            <a:pPr lvl="0"/>
+            <a:r>
+              <a:rPr/>
+              <a:t>Does the altitude of a coffee farm predict its cupping score? </a:t>
+            </a:r>
+            <a:r>
+              <a:rPr i="1"/>
+              <a:t>(regression)</a:t>
+            </a:r>
+          </a:p>
+          <a:p>
+            <a:pPr lvl="0"/>
+            <a:r>
+              <a:rPr/>
+              <a:t>Does Lake Erie show a stronger ice-loss trend than Lake Superior? </a:t>
+            </a:r>
+            <a:r>
+              <a:rPr i="1"/>
+              <a:t>(compare two slopes)</a:t>
+            </a:r>
+          </a:p>
+          <a:p>
+            <a:pPr lvl="0"/>
+            <a:r>
+              <a:rPr/>
+              <a:t>Does bird species richness differ between NEON forest and grassland sites? </a:t>
+            </a:r>
+            <a:r>
+              <a:rPr i="1"/>
+              <a:t>(t-test)</a:t>
+            </a:r>
+          </a:p>
+        </p:txBody>
+      </p:sp>
+      <p:sp>
+        <p:nvSpPr>
+          <p:cNvPr id="4" name="Content Placeholder 3"/>
+          <p:cNvSpPr>
+            <a:spLocks noGrp="1"/>
+          </p:cNvSpPr>
+          <p:nvPr>
+            <p:ph idx="2" sz="half"/>
+          </p:nvPr>
+        </p:nvSpPr>
+        <p:spPr/>
+        <p:txBody>
+          <a:bodyPr/>
+          <a:lstStyle/>
+          <a:p>
+            <a:pPr lvl="0" indent="0" marL="0">
+              <a:buNone/>
+            </a:pPr>
+            <a:r>
+              <a:rPr b="1"/>
+              <a:t>Avoid questions like:</a:t>
+            </a:r>
+          </a:p>
+          <a:p>
+            <a:pPr lvl="0"/>
+            <a:r>
+              <a:rPr/>
+              <a:t>“What is interesting about this dataset?” — too vague for H₀/Hₐ</a:t>
+            </a:r>
+          </a:p>
+          <a:p>
+            <a:pPr lvl="0"/>
+            <a:r>
+              <a:rPr/>
+              <a:t>“Which state has the most UFO sightings?” — descriptive, not inferential</a:t>
+            </a:r>
+          </a:p>
+          <a:p>
+            <a:pPr lvl="0"/>
+            <a:r>
+              <a:rPr/>
+              <a:t>“Is climate change real?” — not answerable with one dataset</a:t>
+            </a:r>
+          </a:p>
+          <a:p>
+            <a:pPr lvl="0" indent="0" marL="0">
+              <a:buNone/>
+            </a:pPr>
+            <a:r>
+              <a:rPr b="1"/>
+              <a:t>A useful test:</a:t>
+            </a:r>
+          </a:p>
+          <a:p>
+            <a:pPr lvl="0" indent="0" marL="0">
+              <a:buNone/>
+            </a:pPr>
+            <a:r>
+              <a:rPr/>
+              <a:t>Can you write H₀ and Hₐ in one sentence each? If yes, you have a testable question. If not, keep narrowing.</a:t>
+            </a:r>
+          </a:p>
+          <a:p>
+            <a:pPr lvl="0" indent="0" marL="0">
+              <a:buNone/>
+            </a:pPr>
+            <a:r>
+              <a:rPr/>
+              <a:t>📖 R4DS Ch. 1.1 — framing a data science question</a:t>
             </a:r>
           </a:p>
         </p:txBody>
@@ -3834,8 +4225,8 @@
         </p:nvSpPr>
         <p:spPr>
           <a:xfrm>
-            <a:off x="0" y="0"/>
-            <a:ext cx="9144000" cy="582780"/>
+            <a:off x="139485" y="78119"/>
+            <a:ext cx="8229600" cy="607682"/>
           </a:xfrm>
         </p:spPr>
         <p:txBody>
@@ -3847,235 +4238,403 @@
             </a:pPr>
             <a:r>
               <a:rPr/>
-              <a:t>Going further</a:t>
-            </a:r>
-          </a:p>
-        </p:txBody>
-      </p:sp>
-      <p:sp>
-        <p:nvSpPr>
-          <p:cNvPr id="3" name="Content Placeholder 2"/>
-          <p:cNvSpPr>
-            <a:spLocks noGrp="1"/>
-          </p:cNvSpPr>
+              <a:t>The Workflow You Already Know</a:t>
+            </a:r>
+          </a:p>
+        </p:txBody>
+      </p:sp>
+      <p:sp>
+        <p:nvSpPr>
+          <p:cNvPr id="3" name="Text Placeholder 2"/>
+          <p:cNvSpPr>
+            <a:spLocks noGrp="1"/>
+          </p:cNvSpPr>
+          <p:nvPr>
+            <p:ph idx="1" type="body"/>
+          </p:nvPr>
+        </p:nvSpPr>
+        <p:spPr/>
+        <p:txBody>
+          <a:bodyPr/>
+          <a:lstStyle/>
+          <a:p>
+            <a:pPr lvl="0" indent="0" marL="0">
+              <a:buNone/>
+            </a:pPr>
+            <a:r>
+              <a:rPr/>
+              <a:t>Every milestone maps to something you’ve already done in this class:</a:t>
+            </a:r>
+          </a:p>
+        </p:txBody>
+      </p:sp>
+      <p:graphicFrame>
+        <p:nvGraphicFramePr>
+          <p:cNvPr id="6" name="Content Placeholder 5"/>
+          <p:cNvGraphicFramePr>
+            <a:graphicFrameLocks noGrp="1"/>
+          </p:cNvGraphicFramePr>
           <p:nvPr>
             <p:ph idx="1"/>
           </p:nvPr>
+        </p:nvGraphicFramePr>
+        <p:xfrm>
+          <a:off x="127000" y="1270000"/>
+          <a:ext cx="4432300" cy="3302000"/>
+        </p:xfrm>
+        <a:graphic>
+          <a:graphicData uri="http://schemas.openxmlformats.org/drawingml/2006/table">
+            <a:tbl>
+              <a:tblPr firstRow="1" bandRow="1">
+                <a:tableStyleId>{5C22544A-7EE6-4342-B048-85BDC9FD1C3A}</a:tableStyleId>
+              </a:tblPr>
+              <a:tblGrid>
+                <a:gridCol w="1600200"/>
+                <a:gridCol w="2832100"/>
+              </a:tblGrid>
+              <a:tr h="0">
+                <a:tc>
+                  <a:txBody>
+                    <a:bodyPr/>
+                    <a:lstStyle/>
+                    <a:p>
+                      <a:pPr lvl="0" indent="0" marL="0">
+                        <a:buNone/>
+                      </a:pPr>
+                      <a:r>
+                        <a:rPr/>
+                        <a:t>Milestone</a:t>
+                      </a:r>
+                    </a:p>
+                  </a:txBody>
+                  <a:tcPr/>
+                </a:tc>
+                <a:tc>
+                  <a:txBody>
+                    <a:bodyPr/>
+                    <a:lstStyle/>
+                    <a:p>
+                      <a:pPr lvl="0" indent="0" marL="0">
+                        <a:buNone/>
+                      </a:pPr>
+                      <a:r>
+                        <a:rPr/>
+                        <a:t>Skill you already have</a:t>
+                      </a:r>
+                    </a:p>
+                  </a:txBody>
+                  <a:tcPr/>
+                </a:tc>
+              </a:tr>
+              <a:tr h="0">
+                <a:tc>
+                  <a:txBody>
+                    <a:bodyPr/>
+                    <a:lstStyle/>
+                    <a:p>
+                      <a:pPr lvl="0" indent="0" marL="0">
+                        <a:buNone/>
+                      </a:pPr>
+                      <a:r>
+                        <a:rPr/>
+                        <a:t>M1 — find dataset, state hypotheses</a:t>
+                      </a:r>
+                    </a:p>
+                  </a:txBody>
+                </a:tc>
+                <a:tc>
+                  <a:txBody>
+                    <a:bodyPr/>
+                    <a:lstStyle/>
+                    <a:p>
+                      <a:pPr lvl="0" indent="0" marL="0">
+                        <a:buNone/>
+                      </a:pPr>
+                      <a:r>
+                        <a:rPr/>
+                        <a:t>Lecture 01 — null vs. alternate hypotheses</a:t>
+                      </a:r>
+                    </a:p>
+                  </a:txBody>
+                </a:tc>
+              </a:tr>
+              <a:tr h="0">
+                <a:tc>
+                  <a:txBody>
+                    <a:bodyPr/>
+                    <a:lstStyle/>
+                    <a:p>
+                      <a:pPr lvl="0" indent="0" marL="0">
+                        <a:buNone/>
+                      </a:pPr>
+                      <a:r>
+                        <a:rPr/>
+                        <a:t>M2 — load in R, </a:t>
+                      </a:r>
+                      <a:r>
+                        <a:rPr>
+                          <a:latin typeface="Courier"/>
+                        </a:rPr>
+                        <a:t>glimpse()</a:t>
+                      </a:r>
+                      <a:r>
+                        <a:rPr/>
+                        <a:t>, first plot</a:t>
+                      </a:r>
+                    </a:p>
+                  </a:txBody>
+                </a:tc>
+                <a:tc>
+                  <a:txBody>
+                    <a:bodyPr/>
+                    <a:lstStyle/>
+                    <a:p>
+                      <a:pPr lvl="0" indent="0" marL="0">
+                        <a:buNone/>
+                      </a:pPr>
+                      <a:r>
+                        <a:rPr/>
+                        <a:t>Lecture 02/03 — </a:t>
+                      </a:r>
+                      <a:r>
+                        <a:rPr>
+                          <a:latin typeface="Courier"/>
+                        </a:rPr>
+                        <a:t>read_csv()</a:t>
+                      </a:r>
+                      <a:r>
+                        <a:rPr/>
+                        <a:t>, </a:t>
+                      </a:r>
+                      <a:r>
+                        <a:rPr>
+                          <a:latin typeface="Courier"/>
+                        </a:rPr>
+                        <a:t>ggplot()</a:t>
+                      </a:r>
+                    </a:p>
+                  </a:txBody>
+                </a:tc>
+              </a:tr>
+              <a:tr h="0">
+                <a:tc>
+                  <a:txBody>
+                    <a:bodyPr/>
+                    <a:lstStyle/>
+                    <a:p>
+                      <a:pPr lvl="0" indent="0" marL="0">
+                        <a:buNone/>
+                      </a:pPr>
+                      <a:r>
+                        <a:rPr/>
+                        <a:t>M3 — clean + exploratory figures</a:t>
+                      </a:r>
+                    </a:p>
+                  </a:txBody>
+                </a:tc>
+                <a:tc>
+                  <a:txBody>
+                    <a:bodyPr/>
+                    <a:lstStyle/>
+                    <a:p>
+                      <a:pPr lvl="0" indent="0" marL="0">
+                        <a:buNone/>
+                      </a:pPr>
+                      <a:r>
+                        <a:rPr/>
+                        <a:t>Lecture 03/04 — </a:t>
+                      </a:r>
+                      <a:r>
+                        <a:rPr>
+                          <a:latin typeface="Courier"/>
+                        </a:rPr>
+                        <a:t>filter()</a:t>
+                      </a:r>
+                      <a:r>
+                        <a:rPr/>
+                        <a:t>, </a:t>
+                      </a:r>
+                      <a:r>
+                        <a:rPr>
+                          <a:latin typeface="Courier"/>
+                        </a:rPr>
+                        <a:t>mutate()</a:t>
+                      </a:r>
+                      <a:r>
+                        <a:rPr/>
+                        <a:t>, boxplots</a:t>
+                      </a:r>
+                    </a:p>
+                  </a:txBody>
+                </a:tc>
+              </a:tr>
+              <a:tr h="0">
+                <a:tc>
+                  <a:txBody>
+                    <a:bodyPr/>
+                    <a:lstStyle/>
+                    <a:p>
+                      <a:pPr lvl="0" indent="0" marL="0">
+                        <a:buNone/>
+                      </a:pPr>
+                      <a:r>
+                        <a:rPr/>
+                        <a:t>M4 — statistical model + assumption checks</a:t>
+                      </a:r>
+                    </a:p>
+                  </a:txBody>
+                </a:tc>
+                <a:tc>
+                  <a:txBody>
+                    <a:bodyPr/>
+                    <a:lstStyle/>
+                    <a:p>
+                      <a:pPr lvl="0" indent="0" marL="0">
+                        <a:buNone/>
+                      </a:pPr>
+                      <a:r>
+                        <a:rPr/>
+                        <a:t>Lecture 05/06 — </a:t>
+                      </a:r>
+                      <a:r>
+                        <a:rPr>
+                          <a:latin typeface="Courier"/>
+                        </a:rPr>
+                        <a:t>lm()</a:t>
+                      </a:r>
+                      <a:r>
+                        <a:rPr/>
+                        <a:t>, residual plots, </a:t>
+                      </a:r>
+                      <a:r>
+                        <a:rPr>
+                          <a:latin typeface="Courier"/>
+                        </a:rPr>
+                        <a:t>lm()</a:t>
+                      </a:r>
+                    </a:p>
+                  </a:txBody>
+                </a:tc>
+              </a:tr>
+              <a:tr h="0">
+                <a:tc>
+                  <a:txBody>
+                    <a:bodyPr/>
+                    <a:lstStyle/>
+                    <a:p>
+                      <a:pPr lvl="0" indent="0" marL="0">
+                        <a:buNone/>
+                      </a:pPr>
+                      <a:r>
+                        <a:rPr/>
+                        <a:t>M5 — Quarto report knitted to HTML</a:t>
+                      </a:r>
+                    </a:p>
+                  </a:txBody>
+                </a:tc>
+                <a:tc>
+                  <a:txBody>
+                    <a:bodyPr/>
+                    <a:lstStyle/>
+                    <a:p>
+                      <a:pPr lvl="0" indent="0" marL="0">
+                        <a:buNone/>
+                      </a:pPr>
+                      <a:r>
+                        <a:rPr/>
+                        <a:t>Every lecture — you’ve been doing this all semester</a:t>
+                      </a:r>
+                    </a:p>
+                  </a:txBody>
+                </a:tc>
+              </a:tr>
+            </a:tbl>
+          </a:graphicData>
+        </a:graphic>
+      </p:graphicFrame>
+      <p:sp>
+        <p:nvSpPr>
+          <p:cNvPr id="4" name="Content Placeholder 3"/>
+          <p:cNvSpPr>
+            <a:spLocks noGrp="1"/>
+          </p:cNvSpPr>
+          <p:nvPr>
+            <p:ph idx="2" sz="half"/>
+          </p:nvPr>
         </p:nvSpPr>
         <p:spPr/>
         <p:txBody>
           <a:bodyPr/>
           <a:lstStyle/>
           <a:p>
+            <a:pPr lvl="0" indent="0" marL="0">
+              <a:buNone/>
+            </a:pPr>
+            <a:r>
+              <a:rPr/>
+              <a:t>You are not learning new tools for the final project — you are applying the tools you already have to data you chose.</a:t>
+            </a:r>
+          </a:p>
+        </p:txBody>
+      </p:sp>
+      <p:sp>
+        <p:nvSpPr>
+          <p:cNvPr id="5" name="Text Placeholder 4"/>
+          <p:cNvSpPr>
+            <a:spLocks noGrp="1"/>
+          </p:cNvSpPr>
+          <p:nvPr>
+            <p:ph idx="3" sz="quarter" type="body"/>
+          </p:nvPr>
+        </p:nvSpPr>
+        <p:spPr/>
+        <p:txBody>
+          <a:bodyPr/>
+          <a:lstStyle/>
+          <a:p>
             <a:pPr lvl="0" indent="0" marL="1270000">
               <a:buNone/>
             </a:pPr>
             <a:r>
+              <a:rPr sz="2000" b="1"/>
+              <a:t>Important</a:t>
+            </a:r>
+          </a:p>
+          <a:p>
+            <a:pPr lvl="0" indent="0" marL="1270000">
+              <a:buNone/>
+            </a:pPr>
+            <a:r>
+              <a:rPr sz="2000" b="1"/>
+              <a:t>The biggest mistake in final projects:</a:t>
+            </a:r>
+          </a:p>
+          <a:p>
+            <a:pPr lvl="0" indent="0" marL="1270000">
+              <a:buNone/>
+            </a:pPr>
+            <a:r>
               <a:rPr sz="2000"/>
-              <a:t>Optional — do this if you finish early or want a stronger proposal.</a:t>
-            </a:r>
-          </a:p>
-          <a:p>
-            <a:pPr lvl="0" indent="0" marL="0">
-              <a:spcBef>
-                <a:spcPts val="3000"/>
-              </a:spcBef>
-              <a:buNone/>
-            </a:pPr>
-            <a:r>
-              <a:rPr b="1"/>
-              <a:t>Try a backup dataset</a:t>
-            </a:r>
-          </a:p>
-          <a:p>
-            <a:pPr lvl="0" indent="0" marL="0">
-              <a:buNone/>
-            </a:pPr>
-            <a:r>
-              <a:rPr/>
-              <a:t>Repeat Parts 3–5 on a </a:t>
-            </a:r>
-            <a:r>
-              <a:rPr b="1"/>
-              <a:t>second</a:t>
-            </a:r>
-            <a:r>
-              <a:rPr/>
-              <a:t> candidate. Having a backup means a dead-end dataset never sinks your project.</a:t>
-            </a:r>
-          </a:p>
-          <a:p>
-            <a:pPr lvl="0" indent="0">
-              <a:buNone/>
-            </a:pPr>
-            <a:r>
-              <a:rPr>
-                <a:solidFill>
-                  <a:srgbClr val="5E5E5E"/>
-                </a:solidFill>
+              <a:t>Waiting until Milestone 3 to actually open the data in R.</a:t>
+            </a:r>
+          </a:p>
+          <a:p>
+            <a:pPr lvl="0" indent="0" marL="1270000">
+              <a:buNone/>
+            </a:pPr>
+            <a:r>
+              <a:rPr sz="2000"/>
+              <a:t>If you can’t load the file and run </a:t>
+            </a:r>
+            <a:r>
+              <a:rPr sz="2000">
                 <a:latin typeface="Courier"/>
               </a:rPr>
-              <a:t># Load a second candidate and size it up -----------------</a:t>
-            </a:r>
-            <a:br/>
-            <a:r>
-              <a:rPr>
-                <a:solidFill>
-                  <a:srgbClr val="003B4F"/>
-                </a:solidFill>
-                <a:latin typeface="Courier"/>
-              </a:rPr>
-              <a:t>backup_df &lt;- </a:t>
-            </a:r>
-            <a:r>
-              <a:rPr>
-                <a:solidFill>
-                  <a:srgbClr val="4758AB"/>
-                </a:solidFill>
-                <a:latin typeface="Courier"/>
-              </a:rPr>
-              <a:t>read_csv</a:t>
-            </a:r>
-            <a:r>
-              <a:rPr>
-                <a:solidFill>
-                  <a:srgbClr val="003B4F"/>
-                </a:solidFill>
-                <a:latin typeface="Courier"/>
-              </a:rPr>
-              <a:t>(</a:t>
-            </a:r>
-            <a:r>
-              <a:rPr>
-                <a:solidFill>
-                  <a:srgbClr val="20794D"/>
-                </a:solidFill>
-                <a:latin typeface="Courier"/>
-              </a:rPr>
-              <a:t>"data/your_backup_file.csv"</a:t>
-            </a:r>
-            <a:r>
-              <a:rPr>
-                <a:solidFill>
-                  <a:srgbClr val="003B4F"/>
-                </a:solidFill>
-                <a:latin typeface="Courier"/>
-              </a:rPr>
-              <a:t>)</a:t>
-            </a:r>
-            <a:br/>
-            <a:r>
-              <a:rPr>
-                <a:solidFill>
-                  <a:srgbClr val="4758AB"/>
-                </a:solidFill>
-                <a:latin typeface="Courier"/>
-              </a:rPr>
-              <a:t>glimpse</a:t>
-            </a:r>
-            <a:r>
-              <a:rPr>
-                <a:solidFill>
-                  <a:srgbClr val="003B4F"/>
-                </a:solidFill>
-                <a:latin typeface="Courier"/>
-              </a:rPr>
-              <a:t>(backup_df)</a:t>
-            </a:r>
-            <a:br/>
-            <a:r>
-              <a:rPr>
-                <a:solidFill>
-                  <a:srgbClr val="4758AB"/>
-                </a:solidFill>
-                <a:latin typeface="Courier"/>
-              </a:rPr>
-              <a:t>dim</a:t>
-            </a:r>
-            <a:r>
-              <a:rPr>
-                <a:solidFill>
-                  <a:srgbClr val="003B4F"/>
-                </a:solidFill>
-                <a:latin typeface="Courier"/>
-              </a:rPr>
-              <a:t>(backup_df)</a:t>
-            </a:r>
-          </a:p>
-          <a:p>
-            <a:pPr lvl="0" indent="0" marL="0">
-              <a:buNone/>
-            </a:pPr>
-            <a:r>
-              <a:rPr/>
-              <a:t>✏️ </a:t>
-            </a:r>
-            <a:r>
-              <a:rPr b="1"/>
-              <a:t>Your turn:</a:t>
-            </a:r>
-            <a:r>
-              <a:rPr/>
-              <a:t> Which of your two candidates is the stronger project, and why?</a:t>
-            </a:r>
-          </a:p>
-          <a:p>
-            <a:pPr lvl="0" indent="0">
-              <a:buNone/>
-            </a:pPr>
-            <a:r>
-              <a:rPr>
-                <a:latin typeface="Courier"/>
-              </a:rPr>
-              <a:t>Your answer:</a:t>
-            </a:r>
-          </a:p>
-          <a:p>
-            <a:pPr lvl="0" indent="0" marL="0">
-              <a:spcBef>
-                <a:spcPts val="3000"/>
-              </a:spcBef>
-              <a:buNone/>
-            </a:pPr>
-            <a:r>
-              <a:rPr b="1"/>
-              <a:t>Pressure-test your question</a:t>
-            </a:r>
-          </a:p>
-          <a:p>
-            <a:pPr lvl="0" indent="0" marL="0">
-              <a:buNone/>
-            </a:pPr>
-            <a:r>
-              <a:rPr/>
-              <a:t>✏️ </a:t>
-            </a:r>
-            <a:r>
-              <a:rPr b="1"/>
-              <a:t>Your turn:</a:t>
-            </a:r>
-            <a:r>
-              <a:rPr/>
-              <a:t> Show your H₀/Hₐ to a classmate. Can </a:t>
-            </a:r>
-            <a:r>
-              <a:rPr i="1"/>
-              <a:t>they</a:t>
-            </a:r>
-            <a:r>
-              <a:rPr/>
-              <a:t> tell you what plot and test you’d run just from your hypotheses? If not, tighten the wording.</a:t>
-            </a:r>
-          </a:p>
-          <a:p>
-            <a:pPr lvl="0" indent="0">
-              <a:buNone/>
-            </a:pPr>
-            <a:r>
-              <a:rPr>
-                <a:latin typeface="Courier"/>
-              </a:rPr>
-              <a:t>What you changed after their feedback:</a:t>
+              <a:t>glimpse()</a:t>
+            </a:r>
+            <a:r>
+              <a:rPr sz="2000"/>
+              <a:t> in the first week, you will not be able to finish. M2 is your early warning system — take it seriously.</a:t>
             </a:r>
           </a:p>
         </p:txBody>
@@ -4115,8 +4674,11 @@
         <p:spPr>
           <a:xfrm>
             <a:off x="0" y="0"/>
-            <a:ext cx="9144000" cy="582780"/>
+            <a:ext cx="9144000" cy="602780"/>
           </a:xfrm>
+          <a:solidFill>
+            <a:srgbClr val="1A1A2E"/>
+          </a:solidFill>
         </p:spPr>
         <p:txBody>
           <a:bodyPr/>
@@ -4127,7 +4689,7 @@
             </a:pPr>
             <a:r>
               <a:rPr/>
-              <a:t>Getting unstuck</a:t>
+              <a:t>Choosing Wisely — A Practical Checklist</a:t>
             </a:r>
           </a:p>
         </p:txBody>
@@ -4139,7 +4701,7 @@
             <a:spLocks noGrp="1"/>
           </p:cNvSpPr>
           <p:nvPr>
-            <p:ph idx="1"/>
+            <p:ph idx="1" sz="half"/>
           </p:nvPr>
         </p:nvSpPr>
         <p:spPr/>
@@ -4147,171 +4709,304 @@
           <a:bodyPr/>
           <a:lstStyle/>
           <a:p>
-            <a:pPr lvl="0" indent="-342900" marL="342900">
-              <a:buAutoNum type="arabicPeriod"/>
-            </a:pPr>
-            <a:r>
-              <a:rPr b="1">
+            <a:pPr lvl="0" indent="0" marL="0">
+              <a:buNone/>
+            </a:pPr>
+            <a:r>
+              <a:rPr/>
+              <a:t>Before you write your M1 proposal, answer these five questions:</a:t>
+            </a:r>
+          </a:p>
+          <a:p>
+            <a:pPr lvl="0"/>
+            <a:r>
+              <a:rPr/>
+              <a:t>☐ Can I download this data as a CSV (or similar) </a:t>
+            </a:r>
+            <a:r>
+              <a:rPr b="1"/>
+              <a:t>right now</a:t>
+            </a:r>
+            <a:r>
+              <a:rPr/>
+              <a:t>?</a:t>
+            </a:r>
+          </a:p>
+          <a:p>
+            <a:pPr lvl="0"/>
+            <a:r>
+              <a:rPr/>
+              <a:t>☐ Does </a:t>
+            </a:r>
+            <a:r>
+              <a:rPr>
+                <a:latin typeface="Courier"/>
+              </a:rPr>
+              <a:t>dim()</a:t>
+            </a:r>
+            <a:r>
+              <a:rPr/>
+              <a:t> return at least </a:t>
+            </a:r>
+            <a:r>
+              <a:rPr b="1"/>
+              <a:t>50 rows and 3 columns</a:t>
+            </a:r>
+            <a:r>
+              <a:rPr/>
+              <a:t>?</a:t>
+            </a:r>
+          </a:p>
+          <a:p>
+            <a:pPr lvl="0"/>
+            <a:r>
+              <a:rPr/>
+              <a:t>☐ Can I identify a </a:t>
+            </a:r>
+            <a:r>
+              <a:rPr b="1"/>
+              <a:t>numeric Y variable</a:t>
+            </a:r>
+            <a:r>
+              <a:rPr/>
+              <a:t> I want to explain?</a:t>
+            </a:r>
+          </a:p>
+          <a:p>
+            <a:pPr lvl="0"/>
+            <a:r>
+              <a:rPr/>
+              <a:t>☐ Can I identify at least one </a:t>
+            </a:r>
+            <a:r>
+              <a:rPr b="1"/>
+              <a:t>X predictor</a:t>
+            </a:r>
+            <a:r>
+              <a:rPr/>
+              <a:t> (numeric or categorical)?</a:t>
+            </a:r>
+          </a:p>
+          <a:p>
+            <a:pPr lvl="0"/>
+            <a:r>
+              <a:rPr/>
+              <a:t>☐ Can I write a </a:t>
+            </a:r>
+            <a:r>
+              <a:rPr b="1"/>
+              <a:t>one-sentence hypothesis</a:t>
+            </a:r>
+            <a:r>
+              <a:rPr/>
+              <a:t> using those variables?</a:t>
+            </a:r>
+          </a:p>
+          <a:p>
+            <a:pPr lvl="0" indent="0" marL="0">
+              <a:buNone/>
+            </a:pPr>
+            <a:r>
+              <a:rPr/>
+              <a:t>If all five are yes — you have a viable dataset. Submit M1.</a:t>
+            </a:r>
+          </a:p>
+          <a:p>
+            <a:pPr lvl="0" indent="0" marL="0">
+              <a:buNone/>
+            </a:pPr>
+            <a:r>
+              <a:rPr/>
+              <a:t>If any are no — keep looking, or come to office hours.</a:t>
+            </a:r>
+          </a:p>
+        </p:txBody>
+      </p:sp>
+      <p:sp>
+        <p:nvSpPr>
+          <p:cNvPr id="4" name="Content Placeholder 3"/>
+          <p:cNvSpPr>
+            <a:spLocks noGrp="1"/>
+          </p:cNvSpPr>
+          <p:nvPr>
+            <p:ph idx="2" sz="half"/>
+          </p:nvPr>
+        </p:nvSpPr>
+        <p:spPr/>
+        <p:txBody>
+          <a:bodyPr/>
+          <a:lstStyle/>
+          <a:p>
+            <a:pPr lvl="0" indent="0" marL="0">
+              <a:buNone/>
+            </a:pPr>
+            <a:r>
+              <a:rPr b="1"/>
+              <a:t>Practical tip — test your download now:</a:t>
+            </a:r>
+          </a:p>
+          <a:p>
+            <a:pPr lvl="0" indent="0">
+              <a:buNone/>
+            </a:pPr>
+            <a:r>
+              <a:rPr>
+                <a:solidFill>
+                  <a:srgbClr val="5E5E5E"/>
+                </a:solidFill>
+                <a:latin typeface="Courier"/>
+              </a:rPr>
+              <a:t># Try loading your candidate dataset this week ---</a:t>
+            </a:r>
+            <a:br/>
+            <a:r>
+              <a:rPr>
+                <a:solidFill>
+                  <a:srgbClr val="003B4F"/>
+                </a:solidFill>
+                <a:latin typeface="Courier"/>
+              </a:rPr>
+              <a:t>test_df &lt;- </a:t>
+            </a:r>
+            <a:r>
+              <a:rPr>
+                <a:solidFill>
+                  <a:srgbClr val="4758AB"/>
+                </a:solidFill>
+                <a:latin typeface="Courier"/>
+              </a:rPr>
+              <a:t>read_csv</a:t>
+            </a:r>
+            <a:r>
+              <a:rPr>
+                <a:solidFill>
+                  <a:srgbClr val="003B4F"/>
+                </a:solidFill>
+                <a:latin typeface="Courier"/>
+              </a:rPr>
+              <a:t>(</a:t>
+            </a:r>
+            <a:r>
+              <a:rPr>
+                <a:solidFill>
+                  <a:srgbClr val="20794D"/>
+                </a:solidFill>
+                <a:latin typeface="Courier"/>
+              </a:rPr>
+              <a:t>"path/to/your/file.csv"</a:t>
+            </a:r>
+            <a:r>
+              <a:rPr>
+                <a:solidFill>
+                  <a:srgbClr val="003B4F"/>
+                </a:solidFill>
+                <a:latin typeface="Courier"/>
+              </a:rPr>
+              <a:t>)</a:t>
+            </a:r>
+            <a:br/>
+            <a:br/>
+            <a:r>
+              <a:rPr>
+                <a:solidFill>
+                  <a:srgbClr val="4758AB"/>
+                </a:solidFill>
+                <a:latin typeface="Courier"/>
+              </a:rPr>
+              <a:t>glimpse</a:t>
+            </a:r>
+            <a:r>
+              <a:rPr>
+                <a:solidFill>
+                  <a:srgbClr val="003B4F"/>
+                </a:solidFill>
+                <a:latin typeface="Courier"/>
+              </a:rPr>
+              <a:t>(test_df)</a:t>
+            </a:r>
+            <a:br/>
+            <a:r>
+              <a:rPr>
+                <a:solidFill>
+                  <a:srgbClr val="4758AB"/>
+                </a:solidFill>
+                <a:latin typeface="Courier"/>
+              </a:rPr>
+              <a:t>dim</a:t>
+            </a:r>
+            <a:r>
+              <a:rPr>
+                <a:solidFill>
+                  <a:srgbClr val="003B4F"/>
+                </a:solidFill>
+                <a:latin typeface="Courier"/>
+              </a:rPr>
+              <a:t>(test_df)</a:t>
+            </a:r>
+            <a:br/>
+            <a:r>
+              <a:rPr>
+                <a:solidFill>
+                  <a:srgbClr val="4758AB"/>
+                </a:solidFill>
+                <a:latin typeface="Courier"/>
+              </a:rPr>
+              <a:t>head</a:t>
+            </a:r>
+            <a:r>
+              <a:rPr>
+                <a:solidFill>
+                  <a:srgbClr val="003B4F"/>
+                </a:solidFill>
+                <a:latin typeface="Courier"/>
+              </a:rPr>
+              <a:t>(test_df)</a:t>
+            </a:r>
+          </a:p>
+          <a:p>
+            <a:pPr lvl="0" indent="0" marL="0">
+              <a:buNone/>
+            </a:pPr>
+            <a:r>
+              <a:rPr/>
+              <a:t>If </a:t>
+            </a:r>
+            <a:r>
+              <a:rPr>
                 <a:latin typeface="Courier"/>
               </a:rPr>
               <a:t>read_csv()</a:t>
             </a:r>
             <a:r>
-              <a:rPr b="1"/>
-              <a:t> error:</a:t>
-            </a:r>
-            <a:r>
-              <a:rPr/>
-              <a:t> check the file is really in </a:t>
+              <a:rPr/>
+              <a:t> throws an error, you want to know that </a:t>
+            </a:r>
+            <a:r>
+              <a:rPr b="1"/>
+              <a:t>before</a:t>
+            </a:r>
+            <a:r>
+              <a:rPr/>
+              <a:t> M1, not after.</a:t>
+            </a:r>
+          </a:p>
+          <a:p>
+            <a:pPr lvl="0" indent="0" marL="0">
+              <a:buNone/>
+            </a:pPr>
+            <a:r>
+              <a:rPr/>
+              <a:t>If the file needs </a:t>
             </a:r>
             <a:r>
               <a:rPr>
                 <a:latin typeface="Courier"/>
               </a:rPr>
-              <a:t>data/</a:t>
-            </a:r>
-            <a:r>
-              <a:rPr/>
-              <a:t> and the name matches exactly (including </a:t>
-            </a:r>
-            <a:r>
-              <a:rPr>
-                <a:latin typeface="Courier"/>
-              </a:rPr>
-              <a:t>.csv</a:t>
-            </a:r>
-            <a:r>
-              <a:rPr/>
-              <a:t>). Try </a:t>
-            </a:r>
-            <a:r>
-              <a:rPr>
-                <a:latin typeface="Courier"/>
-              </a:rPr>
-              <a:t>list.files("data")</a:t>
-            </a:r>
-            <a:r>
-              <a:rPr/>
-              <a:t>.</a:t>
-            </a:r>
-          </a:p>
-          <a:p>
-            <a:pPr lvl="0" indent="-342900" marL="342900">
-              <a:buAutoNum type="arabicPeriod"/>
-            </a:pPr>
-            <a:r>
-              <a:rPr b="1"/>
-              <a:t>Weird columns / one giant column:</a:t>
-            </a:r>
-            <a:r>
-              <a:rPr/>
-              <a:t> the file may be tab- or semicolon-separated — try </a:t>
-            </a:r>
-            <a:r>
-              <a:rPr>
-                <a:latin typeface="Courier"/>
-              </a:rPr>
-              <a:t>read_tsv()</a:t>
-            </a:r>
-            <a:r>
-              <a:rPr/>
-              <a:t> or </a:t>
-            </a:r>
-            <a:r>
-              <a:rPr>
-                <a:latin typeface="Courier"/>
-              </a:rPr>
-              <a:t>read_delim()</a:t>
-            </a:r>
-            <a:r>
-              <a:rPr/>
-              <a:t>.</a:t>
-            </a:r>
-          </a:p>
-          <a:p>
-            <a:pPr lvl="0" indent="-342900" marL="342900">
-              <a:buAutoNum type="arabicPeriod"/>
-            </a:pPr>
-            <a:r>
-              <a:rPr b="1"/>
-              <a:t>Only loads as Excel:</a:t>
-            </a:r>
-            <a:r>
-              <a:rPr/>
-              <a:t> use </a:t>
-            </a:r>
-            <a:r>
-              <a:rPr>
-                <a:latin typeface="Courier"/>
-              </a:rPr>
-              <a:t>library(readxl)</a:t>
-            </a:r>
-            <a:r>
-              <a:rPr/>
-              <a:t> and </a:t>
-            </a:r>
-            <a:r>
-              <a:rPr>
-                <a:latin typeface="Courier"/>
-              </a:rPr>
-              <a:t>read_excel("data/your_file.xlsx")</a:t>
-            </a:r>
-            <a:r>
-              <a:rPr/>
-              <a:t>.</a:t>
-            </a:r>
-          </a:p>
-          <a:p>
-            <a:pPr lvl="0" indent="-342900" marL="342900">
-              <a:buAutoNum type="arabicPeriod"/>
-            </a:pPr>
-            <a:r>
-              <a:rPr b="1"/>
-              <a:t>Column names have spaces or capitals:</a:t>
-            </a:r>
-            <a:r>
-              <a:rPr/>
-              <a:t> check exact names with </a:t>
-            </a:r>
-            <a:r>
-              <a:rPr>
-                <a:latin typeface="Courier"/>
-              </a:rPr>
-              <a:t>names(my_data_df)</a:t>
-            </a:r>
-            <a:r>
-              <a:rPr/>
-              <a:t>.</a:t>
-            </a:r>
-          </a:p>
-          <a:p>
-            <a:pPr lvl="0" indent="-342900" marL="342900">
-              <a:buAutoNum type="arabicPeriod"/>
-            </a:pPr>
-            <a:r>
-              <a:rPr b="1"/>
-              <a:t>Can’t find a dataset you like:</a:t>
-            </a:r>
-            <a:r>
-              <a:rPr/>
-              <a:t> Google Dataset Search + a topic + “csv”, or bring a topic to office hours.</a:t>
-            </a:r>
-          </a:p>
-          <a:p>
-            <a:pPr lvl="0" indent="0" marL="1270000">
-              <a:buNone/>
-            </a:pPr>
-            <a:r>
-              <a:rPr sz="2000"/>
-              <a:t>💡 </a:t>
-            </a:r>
-            <a:r>
-              <a:rPr sz="2000" b="1"/>
-              <a:t>Key idea:</a:t>
-            </a:r>
-            <a:r>
-              <a:rPr sz="2000"/>
-              <a:t> every dataset you’ll ever download needs this same first pass — download → load → glimpse → identify X and Y. You now have it.</a:t>
+              <a:t>read.table()</a:t>
+            </a:r>
+            <a:r>
+              <a:rPr/>
+              <a:t> or special arguments (like our ice data did), that’s fine — but discover it early.</a:t>
             </a:r>
           </a:p>
         </p:txBody>
@@ -4340,12 +5035,45 @@
       </p:grpSpPr>
       <p:sp>
         <p:nvSpPr>
+          <p:cNvPr id="2" name="Title 1"/>
+          <p:cNvSpPr>
+            <a:spLocks noGrp="1"/>
+          </p:cNvSpPr>
+          <p:nvPr>
+            <p:ph type="title"/>
+          </p:nvPr>
+        </p:nvSpPr>
+        <p:spPr>
+          <a:xfrm>
+            <a:off x="0" y="0"/>
+            <a:ext cx="9144000" cy="602780"/>
+          </a:xfrm>
+          <a:solidFill>
+            <a:srgbClr val="1A1A2E"/>
+          </a:solidFill>
+        </p:spPr>
+        <p:txBody>
+          <a:bodyPr/>
+          <a:lstStyle/>
+          <a:p>
+            <a:pPr lvl="0" indent="0" marL="0">
+              <a:buNone/>
+            </a:pPr>
+            <a:r>
+              <a:rPr/>
+              <a:t>Common Pitfalls and How to Avoid Them</a:t>
+            </a:r>
+          </a:p>
+        </p:txBody>
+      </p:sp>
+      <p:sp>
+        <p:nvSpPr>
           <p:cNvPr id="3" name="Content Placeholder 2"/>
           <p:cNvSpPr>
             <a:spLocks noGrp="1"/>
           </p:cNvSpPr>
           <p:nvPr>
-            <p:ph idx="1"/>
+            <p:ph idx="1" sz="half"/>
           </p:nvPr>
         </p:nvSpPr>
         <p:spPr/>
@@ -4357,8 +5085,984 @@
               <a:buNone/>
             </a:pPr>
             <a:r>
+              <a:rPr b="1"/>
+              <a:t>“I can’t find a dataset I like”</a:t>
+            </a:r>
+          </a:p>
+          <a:p>
+            <a:pPr lvl="0"/>
+            <a:r>
+              <a:rPr/>
+              <a:t>Try Google Dataset Search first: </a:t>
+            </a:r>
+            <a:r>
+              <a:rPr>
+                <a:latin typeface="Courier"/>
+              </a:rPr>
+              <a:t>datasetsearch.research.google.com</a:t>
+            </a:r>
+          </a:p>
+          <a:p>
+            <a:pPr lvl="0"/>
+            <a:r>
+              <a:rPr/>
+              <a:t>Search for a topic you’re already interested in + the word “data” or “csv”</a:t>
+            </a:r>
+          </a:p>
+          <a:p>
+            <a:pPr lvl="0"/>
+            <a:r>
+              <a:rPr/>
+              <a:t>Come to office hours with a general topic — I can usually point you to a source in five minutes</a:t>
+            </a:r>
+          </a:p>
+          <a:p>
+            <a:pPr lvl="0" indent="0" marL="0">
+              <a:buNone/>
+            </a:pPr>
+            <a:r>
+              <a:rPr b="1"/>
+              <a:t>“My dataset is too messy to analyze”</a:t>
+            </a:r>
+          </a:p>
+          <a:p>
+            <a:pPr lvl="0"/>
+            <a:r>
+              <a:rPr/>
+              <a:t>Messy is fine for this course — cleaning is the first two milestones</a:t>
+            </a:r>
+          </a:p>
+          <a:p>
+            <a:pPr lvl="0"/>
+            <a:r>
+              <a:rPr/>
+              <a:t>If you can </a:t>
+            </a:r>
+            <a:r>
+              <a:rPr>
+                <a:latin typeface="Courier"/>
+              </a:rPr>
+              <a:t>read_csv()</a:t>
+            </a:r>
+            <a:r>
+              <a:rPr/>
+              <a:t> it and </a:t>
+            </a:r>
+            <a:r>
+              <a:rPr>
+                <a:latin typeface="Courier"/>
+              </a:rPr>
+              <a:t>glimpse()</a:t>
+            </a:r>
+            <a:r>
+              <a:rPr/>
+              <a:t> it, you can work with it</a:t>
+            </a:r>
+          </a:p>
+          <a:p>
+            <a:pPr lvl="0"/>
+            <a:r>
+              <a:rPr/>
+              <a:t>You don’t need every column — a well-chosen </a:t>
+            </a:r>
+            <a:r>
+              <a:rPr>
+                <a:latin typeface="Courier"/>
+              </a:rPr>
+              <a:t>select()</a:t>
+            </a:r>
+            <a:r>
+              <a:rPr/>
+              <a:t> is enough</a:t>
+            </a:r>
+          </a:p>
+          <a:p>
+            <a:pPr lvl="0" indent="0" marL="0">
+              <a:buNone/>
+            </a:pPr>
+            <a:r>
+              <a:rPr b="1"/>
+              <a:t>“I can’t figure out what question to ask”</a:t>
+            </a:r>
+          </a:p>
+          <a:p>
+            <a:pPr lvl="0"/>
+            <a:r>
+              <a:rPr/>
+              <a:t>Start with the variables: what is numeric? What is categorical?</a:t>
+            </a:r>
+          </a:p>
+          <a:p>
+            <a:pPr lvl="0"/>
+            <a:r>
+              <a:rPr/>
+              <a:t>Ask: “what would I predict, before looking at the data?”</a:t>
+            </a:r>
+          </a:p>
+          <a:p>
+            <a:pPr lvl="0"/>
+            <a:r>
+              <a:rPr/>
+              <a:t>That prediction is your Hₐ; its opposite is H₀</a:t>
+            </a:r>
+          </a:p>
+        </p:txBody>
+      </p:sp>
+      <p:sp>
+        <p:nvSpPr>
+          <p:cNvPr id="4" name="Content Placeholder 3"/>
+          <p:cNvSpPr>
+            <a:spLocks noGrp="1"/>
+          </p:cNvSpPr>
+          <p:nvPr>
+            <p:ph idx="2" sz="half"/>
+          </p:nvPr>
+        </p:nvSpPr>
+        <p:spPr/>
+        <p:txBody>
+          <a:bodyPr/>
+          <a:lstStyle/>
+          <a:p>
+            <a:pPr lvl="0" indent="0" marL="0">
+              <a:buNone/>
+            </a:pPr>
+            <a:r>
+              <a:rPr b="1"/>
+              <a:t>“My dataset only has two columns”</a:t>
+            </a:r>
+          </a:p>
+          <a:p>
+            <a:pPr lvl="0"/>
+            <a:r>
+              <a:rPr/>
+              <a:t>You need at least one X and one Y — two columns </a:t>
+            </a:r>
+            <a:r>
               <a:rPr i="1"/>
-              <a:t>End of Activity 08. Next: Lecture 09 — loading and cleaning your own dataset (Milestone 2).</a:t>
+              <a:t>can</a:t>
+            </a:r>
+            <a:r>
+              <a:rPr/>
+              <a:t> be enough for regression</a:t>
+            </a:r>
+          </a:p>
+          <a:p>
+            <a:pPr lvl="0"/>
+            <a:r>
+              <a:rPr/>
+              <a:t>But usually: look for a richer version of the same dataset on the same source</a:t>
+            </a:r>
+          </a:p>
+          <a:p>
+            <a:pPr lvl="0" indent="0" marL="0">
+              <a:buNone/>
+            </a:pPr>
+            <a:r>
+              <a:rPr b="1"/>
+              <a:t>“I already started analyzing before M1 was approved”</a:t>
+            </a:r>
+          </a:p>
+          <a:p>
+            <a:pPr lvl="0"/>
+            <a:r>
+              <a:rPr/>
+              <a:t>Submit M1 anyway — describe what you’ve done so far</a:t>
+            </a:r>
+          </a:p>
+          <a:p>
+            <a:pPr lvl="0"/>
+            <a:r>
+              <a:rPr/>
+              <a:t>I’ll either approve it or redirect you before you go further</a:t>
+            </a:r>
+          </a:p>
+          <a:p>
+            <a:pPr lvl="0" indent="0" marL="1270000">
+              <a:buNone/>
+            </a:pPr>
+            <a:r>
+              <a:rPr sz="2000" b="1"/>
+              <a:t>Tip</a:t>
+            </a:r>
+          </a:p>
+          <a:p>
+            <a:pPr lvl="0" indent="0" marL="1270000">
+              <a:buNone/>
+            </a:pPr>
+            <a:r>
+              <a:rPr sz="2000" b="1"/>
+              <a:t>Office hours exist for this.</a:t>
+            </a:r>
+            <a:r>
+              <a:rPr sz="2000"/>
+              <a:t> If you’re stuck on finding or loading a dataset, come in. Don’t wait until the M2 deadline.</a:t>
+            </a:r>
+          </a:p>
+        </p:txBody>
+      </p:sp>
+    </p:spTree>
+  </p:cSld>
+</p:sld>
+</file>
+
+<file path=ppt/slides/slide16.xml><?xml version="1.0" encoding="utf-8"?>
+<p:sld xmlns:a="http://schemas.openxmlformats.org/drawingml/2006/main" xmlns:r="http://schemas.openxmlformats.org/officeDocument/2006/relationships" xmlns:p="http://schemas.openxmlformats.org/presentationml/2006/main">
+  <p:cSld>
+    <p:spTree>
+      <p:nvGrpSpPr>
+        <p:cNvPr id="1" name=""/>
+        <p:cNvGrpSpPr/>
+        <p:nvPr/>
+      </p:nvGrpSpPr>
+      <p:grpSpPr>
+        <a:xfrm>
+          <a:off x="0" y="0"/>
+          <a:ext cx="0" cy="0"/>
+          <a:chOff x="0" y="0"/>
+          <a:chExt cx="0" cy="0"/>
+        </a:xfrm>
+      </p:grpSpPr>
+      <p:sp>
+        <p:nvSpPr>
+          <p:cNvPr id="2" name="Title 1"/>
+          <p:cNvSpPr>
+            <a:spLocks noGrp="1"/>
+          </p:cNvSpPr>
+          <p:nvPr>
+            <p:ph type="title"/>
+          </p:nvPr>
+        </p:nvSpPr>
+        <p:spPr>
+          <a:xfrm>
+            <a:off x="0" y="0"/>
+            <a:ext cx="9144000" cy="602780"/>
+          </a:xfrm>
+          <a:solidFill>
+            <a:srgbClr val="1A1A2E"/>
+          </a:solidFill>
+        </p:spPr>
+        <p:txBody>
+          <a:bodyPr/>
+          <a:lstStyle/>
+          <a:p>
+            <a:pPr lvl="0" indent="0" marL="0">
+              <a:buNone/>
+            </a:pPr>
+            <a:r>
+              <a:rPr/>
+              <a:t>What a Strong Final Project Looks Like</a:t>
+            </a:r>
+          </a:p>
+        </p:txBody>
+      </p:sp>
+      <p:sp>
+        <p:nvSpPr>
+          <p:cNvPr id="3" name="Content Placeholder 2"/>
+          <p:cNvSpPr>
+            <a:spLocks noGrp="1"/>
+          </p:cNvSpPr>
+          <p:nvPr>
+            <p:ph idx="1" sz="half"/>
+          </p:nvPr>
+        </p:nvSpPr>
+        <p:spPr/>
+        <p:txBody>
+          <a:bodyPr/>
+          <a:lstStyle/>
+          <a:p>
+            <a:pPr lvl="0" indent="0" marL="0">
+              <a:buNone/>
+            </a:pPr>
+            <a:r>
+              <a:rPr b="1"/>
+              <a:t>From past semesters, strong projects have:</a:t>
+            </a:r>
+          </a:p>
+          <a:p>
+            <a:pPr lvl="0"/>
+            <a:r>
+              <a:rPr/>
+              <a:t>A </a:t>
+            </a:r>
+            <a:r>
+              <a:rPr b="1"/>
+              <a:t>clear narrative</a:t>
+            </a:r>
+            <a:r>
+              <a:rPr/>
+              <a:t> — the report tells a story from question to answer</a:t>
+            </a:r>
+          </a:p>
+          <a:p>
+            <a:pPr lvl="0"/>
+            <a:r>
+              <a:rPr b="1"/>
+              <a:t>Figures that do the talking</a:t>
+            </a:r>
+            <a:r>
+              <a:rPr/>
+              <a:t> — the key result is visible in a plot before the stats confirm it</a:t>
+            </a:r>
+          </a:p>
+          <a:p>
+            <a:pPr lvl="0"/>
+            <a:r>
+              <a:rPr b="1"/>
+              <a:t>Simple, correct statistics</a:t>
+            </a:r>
+            <a:r>
+              <a:rPr/>
+              <a:t> — one well-interpreted </a:t>
+            </a:r>
+            <a:r>
+              <a:rPr>
+                <a:latin typeface="Courier"/>
+              </a:rPr>
+              <a:t>lm()</a:t>
+            </a:r>
+            <a:r>
+              <a:rPr/>
+              <a:t> beats three confused ones</a:t>
+            </a:r>
+          </a:p>
+          <a:p>
+            <a:pPr lvl="0"/>
+            <a:r>
+              <a:rPr b="1"/>
+              <a:t>Honest interpretation</a:t>
+            </a:r>
+            <a:r>
+              <a:rPr/>
+              <a:t> — “the trend was not significant (p = 0.12), which may reflect the small sample size” is a perfectly valid finding</a:t>
+            </a:r>
+          </a:p>
+          <a:p>
+            <a:pPr lvl="0"/>
+            <a:r>
+              <a:rPr b="1"/>
+              <a:t>Code that runs</a:t>
+            </a:r>
+            <a:r>
+              <a:rPr/>
+              <a:t> — the Quarto file knits to HTML without errors, every time</a:t>
+            </a:r>
+          </a:p>
+          <a:p>
+            <a:pPr lvl="0" indent="0" marL="0">
+              <a:buNone/>
+            </a:pPr>
+            <a:r>
+              <a:rPr b="1"/>
+              <a:t>Things that do not make a strong project:</a:t>
+            </a:r>
+          </a:p>
+          <a:p>
+            <a:pPr lvl="0"/>
+            <a:r>
+              <a:rPr/>
+              <a:t>Many analyses, none of which are interpreted</a:t>
+            </a:r>
+          </a:p>
+          <a:p>
+            <a:pPr lvl="0"/>
+            <a:r>
+              <a:rPr/>
+              <a:t>A significant p-value with no plot showing the actual effect</a:t>
+            </a:r>
+          </a:p>
+          <a:p>
+            <a:pPr lvl="0"/>
+            <a:r>
+              <a:rPr/>
+              <a:t>Copied code from Stack Overflow that you can’t explain</a:t>
+            </a:r>
+          </a:p>
+        </p:txBody>
+      </p:sp>
+      <p:sp>
+        <p:nvSpPr>
+          <p:cNvPr id="4" name="Content Placeholder 3"/>
+          <p:cNvSpPr>
+            <a:spLocks noGrp="1"/>
+          </p:cNvSpPr>
+          <p:nvPr>
+            <p:ph idx="2" sz="half"/>
+          </p:nvPr>
+        </p:nvSpPr>
+        <p:spPr/>
+        <p:txBody>
+          <a:bodyPr/>
+          <a:lstStyle/>
+          <a:p>
+            <a:pPr lvl="0" indent="0" marL="0">
+              <a:buNone/>
+            </a:pPr>
+            <a:r>
+              <a:rPr b="1"/>
+              <a:t>The question you will be graded on:</a:t>
+            </a:r>
+          </a:p>
+          <a:p>
+            <a:pPr lvl="0" indent="0" marL="1270000">
+              <a:buNone/>
+            </a:pPr>
+            <a:r>
+              <a:rPr sz="2000"/>
+              <a:t>“Does this report tell me something real about this dataset, using tools from this class, in a way I could reproduce?”</a:t>
+            </a:r>
+          </a:p>
+          <a:p>
+            <a:pPr lvl="0" indent="0" marL="0">
+              <a:buNone/>
+            </a:pPr>
+            <a:r>
+              <a:rPr/>
+              <a:t>Not complexity. Not novelty. </a:t>
+            </a:r>
+            <a:r>
+              <a:rPr b="1"/>
+              <a:t>Clarity and reproducibility.</a:t>
+            </a:r>
+          </a:p>
+          <a:p>
+            <a:pPr lvl="0" indent="0" marL="0">
+              <a:buNone/>
+            </a:pPr>
+            <a:r>
+              <a:rPr/>
+              <a:t>📖 R4DS Ch. 28 — </a:t>
+            </a:r>
+            <a:r>
+              <a:rPr>
+                <a:hlinkClick r:id="rId2"/>
+              </a:rPr>
+              <a:t>Quarto formats: making a final report</a:t>
+            </a:r>
+          </a:p>
+        </p:txBody>
+      </p:sp>
+    </p:spTree>
+  </p:cSld>
+</p:sld>
+</file>
+
+<file path=ppt/slides/slide17.xml><?xml version="1.0" encoding="utf-8"?>
+<p:sld xmlns:a="http://schemas.openxmlformats.org/drawingml/2006/main" xmlns:r="http://schemas.openxmlformats.org/officeDocument/2006/relationships" xmlns:p="http://schemas.openxmlformats.org/presentationml/2006/main">
+  <p:cSld>
+    <p:spTree>
+      <p:nvGrpSpPr>
+        <p:cNvPr id="1" name=""/>
+        <p:cNvGrpSpPr/>
+        <p:nvPr/>
+      </p:nvGrpSpPr>
+      <p:grpSpPr>
+        <a:xfrm>
+          <a:off x="0" y="0"/>
+          <a:ext cx="0" cy="0"/>
+          <a:chOff x="0" y="0"/>
+          <a:chExt cx="0" cy="0"/>
+        </a:xfrm>
+      </p:grpSpPr>
+      <p:sp>
+        <p:nvSpPr>
+          <p:cNvPr id="2" name="Title 1"/>
+          <p:cNvSpPr>
+            <a:spLocks noGrp="1"/>
+          </p:cNvSpPr>
+          <p:nvPr>
+            <p:ph type="title"/>
+          </p:nvPr>
+        </p:nvSpPr>
+        <p:spPr>
+          <a:xfrm>
+            <a:off x="0" y="0"/>
+            <a:ext cx="9144000" cy="602780"/>
+          </a:xfrm>
+          <a:solidFill>
+            <a:srgbClr val="1A1A2E"/>
+          </a:solidFill>
+        </p:spPr>
+        <p:txBody>
+          <a:bodyPr/>
+          <a:lstStyle/>
+          <a:p>
+            <a:pPr lvl="0" indent="0" marL="0">
+              <a:buNone/>
+            </a:pPr>
+            <a:r>
+              <a:rPr/>
+              <a:t>Summary: What to Do This Week</a:t>
+            </a:r>
+          </a:p>
+        </p:txBody>
+      </p:sp>
+      <p:sp>
+        <p:nvSpPr>
+          <p:cNvPr id="3" name="Content Placeholder 2"/>
+          <p:cNvSpPr>
+            <a:spLocks noGrp="1"/>
+          </p:cNvSpPr>
+          <p:nvPr>
+            <p:ph idx="1" sz="half"/>
+          </p:nvPr>
+        </p:nvSpPr>
+        <p:spPr/>
+        <p:txBody>
+          <a:bodyPr/>
+          <a:lstStyle/>
+          <a:p>
+            <a:pPr lvl="0" indent="0" marL="0">
+              <a:buNone/>
+            </a:pPr>
+            <a:r>
+              <a:rPr b="1"/>
+              <a:t>By end of this week:</a:t>
+            </a:r>
+          </a:p>
+          <a:p>
+            <a:pPr lvl="0" indent="-342900" marL="342900">
+              <a:buAutoNum type="arabicPeriod"/>
+            </a:pPr>
+            <a:r>
+              <a:rPr/>
+              <a:t>Visit at least </a:t>
+            </a:r>
+            <a:r>
+              <a:rPr b="1"/>
+              <a:t>three</a:t>
+            </a:r>
+            <a:r>
+              <a:rPr/>
+              <a:t> of the dataset sources shown today</a:t>
+            </a:r>
+          </a:p>
+          <a:p>
+            <a:pPr lvl="0" indent="-342900" marL="342900">
+              <a:buAutoNum type="arabicPeriod"/>
+            </a:pPr>
+            <a:r>
+              <a:rPr/>
+              <a:t>Download a candidate dataset and confirm </a:t>
+            </a:r>
+            <a:r>
+              <a:rPr>
+                <a:latin typeface="Courier"/>
+              </a:rPr>
+              <a:t>read_csv()</a:t>
+            </a:r>
+            <a:r>
+              <a:rPr/>
+              <a:t> loads it</a:t>
+            </a:r>
+          </a:p>
+          <a:p>
+            <a:pPr lvl="0" indent="-342900" marL="342900">
+              <a:buAutoNum type="arabicPeriod"/>
+            </a:pPr>
+            <a:r>
+              <a:rPr/>
+              <a:t>Identify your Y variable, your X variable, and write one sentence of hypothesis</a:t>
+            </a:r>
+          </a:p>
+          <a:p>
+            <a:pPr lvl="0" indent="-342900" marL="342900">
+              <a:buAutoNum type="arabicPeriod"/>
+            </a:pPr>
+            <a:r>
+              <a:rPr/>
+              <a:t>Write your </a:t>
+            </a:r>
+            <a:r>
+              <a:rPr b="1"/>
+              <a:t>Milestone 1 paragraph</a:t>
+            </a:r>
+            <a:r>
+              <a:rPr/>
+              <a:t> (see the template on the next slide)</a:t>
+            </a:r>
+          </a:p>
+          <a:p>
+            <a:pPr lvl="0" indent="-342900" marL="342900">
+              <a:buAutoNum type="arabicPeriod"/>
+            </a:pPr>
+            <a:r>
+              <a:rPr/>
+              <a:t>Submit M1 to Canvas </a:t>
+            </a:r>
+            <a:r>
+              <a:rPr b="1"/>
+              <a:t>before the start of Lecture 09</a:t>
+            </a:r>
+          </a:p>
+          <a:p>
+            <a:pPr lvl="0" indent="0" marL="0">
+              <a:buNone/>
+            </a:pPr>
+            <a:r>
+              <a:rPr b="1"/>
+              <a:t>Resources:</a:t>
+            </a:r>
+          </a:p>
+          <a:p>
+            <a:pPr lvl="0"/>
+            <a:r>
+              <a:rPr/>
+              <a:t>Dataset source list (this slide deck, downloadable)</a:t>
+            </a:r>
+          </a:p>
+          <a:p>
+            <a:pPr lvl="0"/>
+            <a:r>
+              <a:rPr/>
+              <a:t>Office hours — come with a topic or a link, leave with a plan</a:t>
+            </a:r>
+          </a:p>
+          <a:p>
+            <a:pPr lvl="0"/>
+            <a:r>
+              <a:rPr/>
+              <a:t>Canvas discussion board — post a candidate dataset and get peer feedback</a:t>
+            </a:r>
+          </a:p>
+        </p:txBody>
+      </p:sp>
+      <p:sp>
+        <p:nvSpPr>
+          <p:cNvPr id="4" name="Content Placeholder 3"/>
+          <p:cNvSpPr>
+            <a:spLocks noGrp="1"/>
+          </p:cNvSpPr>
+          <p:nvPr>
+            <p:ph idx="2" sz="half"/>
+          </p:nvPr>
+        </p:nvSpPr>
+        <p:spPr/>
+        <p:txBody>
+          <a:bodyPr/>
+          <a:lstStyle/>
+          <a:p>
+            <a:pPr lvl="0" indent="0" marL="0">
+              <a:buNone/>
+            </a:pPr>
+            <a:r>
+              <a:rPr b="1"/>
+              <a:t>Milestone 1 is due: start of Lecture 09</a:t>
+            </a:r>
+          </a:p>
+          <a:p>
+            <a:pPr lvl="0" indent="0" marL="0">
+              <a:buNone/>
+            </a:pPr>
+            <a:r>
+              <a:rPr/>
+              <a:t>It is short. It is low stakes. It is not optional.</a:t>
+            </a:r>
+          </a:p>
+          <a:p>
+            <a:pPr lvl="0" indent="0" marL="0">
+              <a:buNone/>
+            </a:pPr>
+            <a:r>
+              <a:rPr/>
+              <a:t>The purpose is to make sure you have a working dataset </a:t>
+            </a:r>
+            <a:r>
+              <a:rPr b="1"/>
+              <a:t>before</a:t>
+            </a:r>
+            <a:r>
+              <a:rPr/>
+              <a:t> you write any analysis code. Every semester, students who skip or delay M1 struggle at M4 and M5.</a:t>
+            </a:r>
+          </a:p>
+          <a:p>
+            <a:pPr lvl="0" indent="0" marL="1270000">
+              <a:buNone/>
+            </a:pPr>
+            <a:r>
+              <a:rPr sz="2000" b="1"/>
+              <a:t>Important</a:t>
+            </a:r>
+          </a:p>
+          <a:p>
+            <a:pPr lvl="0" indent="0" marL="1270000">
+              <a:buNone/>
+            </a:pPr>
+            <a:r>
+              <a:rPr sz="2000"/>
+              <a:t>Two class periods from now. Write it this weekend.</a:t>
+            </a:r>
+          </a:p>
+        </p:txBody>
+      </p:sp>
+    </p:spTree>
+  </p:cSld>
+</p:sld>
+</file>
+
+<file path=ppt/slides/slide18.xml><?xml version="1.0" encoding="utf-8"?>
+<p:sld xmlns:a="http://schemas.openxmlformats.org/drawingml/2006/main" xmlns:r="http://schemas.openxmlformats.org/officeDocument/2006/relationships" xmlns:p="http://schemas.openxmlformats.org/presentationml/2006/main">
+  <p:cSld>
+    <p:spTree>
+      <p:nvGrpSpPr>
+        <p:cNvPr id="1" name=""/>
+        <p:cNvGrpSpPr/>
+        <p:nvPr/>
+      </p:nvGrpSpPr>
+      <p:grpSpPr>
+        <a:xfrm>
+          <a:off x="0" y="0"/>
+          <a:ext cx="0" cy="0"/>
+          <a:chOff x="0" y="0"/>
+          <a:chExt cx="0" cy="0"/>
+        </a:xfrm>
+      </p:grpSpPr>
+      <p:sp>
+        <p:nvSpPr>
+          <p:cNvPr id="2" name="Title 1"/>
+          <p:cNvSpPr>
+            <a:spLocks noGrp="1"/>
+          </p:cNvSpPr>
+          <p:nvPr>
+            <p:ph type="title"/>
+          </p:nvPr>
+        </p:nvSpPr>
+        <p:spPr>
+          <a:xfrm>
+            <a:off x="0" y="0"/>
+            <a:ext cx="9144000" cy="602780"/>
+          </a:xfrm>
+          <a:solidFill>
+            <a:srgbClr val="1A1A2E"/>
+          </a:solidFill>
+        </p:spPr>
+        <p:txBody>
+          <a:bodyPr/>
+          <a:lstStyle/>
+          <a:p>
+            <a:pPr lvl="0" indent="0" marL="0">
+              <a:buNone/>
+            </a:pPr>
+            <a:r>
+              <a:rPr/>
+              <a:t>Milestone 1 Template</a:t>
+            </a:r>
+          </a:p>
+        </p:txBody>
+      </p:sp>
+      <p:sp>
+        <p:nvSpPr>
+          <p:cNvPr id="3" name="Content Placeholder 2"/>
+          <p:cNvSpPr>
+            <a:spLocks noGrp="1"/>
+          </p:cNvSpPr>
+          <p:nvPr>
+            <p:ph idx="1" sz="half"/>
+          </p:nvPr>
+        </p:nvSpPr>
+        <p:spPr/>
+        <p:txBody>
+          <a:bodyPr/>
+          <a:lstStyle/>
+          <a:p>
+            <a:pPr lvl="0" indent="0" marL="0">
+              <a:buNone/>
+            </a:pPr>
+            <a:r>
+              <a:rPr/>
+              <a:t>Copy this into a Word doc or text file and fill in the blanks:</a:t>
+            </a:r>
+          </a:p>
+          <a:p>
+            <a:pPr lvl="0" indent="0" marL="1270000">
+              <a:buNone/>
+            </a:pPr>
+            <a:r>
+              <a:rPr sz="2000"/>
+              <a:t>“I plan to use the </a:t>
+            </a:r>
+            <a:r>
+              <a:rPr sz="2000" b="1"/>
+              <a:t>[dataset name]</a:t>
+            </a:r>
+            <a:r>
+              <a:rPr sz="2000"/>
+              <a:t> dataset, available at </a:t>
+            </a:r>
+            <a:r>
+              <a:rPr sz="2000" b="1"/>
+              <a:t>[URL]</a:t>
+            </a:r>
+            <a:r>
+              <a:rPr sz="2000"/>
+              <a:t>. It contains approximately </a:t>
+            </a:r>
+            <a:r>
+              <a:rPr sz="2000" b="1"/>
+              <a:t>[n rows]</a:t>
+            </a:r>
+            <a:r>
+              <a:rPr sz="2000"/>
+              <a:t> observations and </a:t>
+            </a:r>
+            <a:r>
+              <a:rPr sz="2000" b="1"/>
+              <a:t>[n columns]</a:t>
+            </a:r>
+            <a:r>
+              <a:rPr sz="2000"/>
+              <a:t> variables. The key variables I plan to use are </a:t>
+            </a:r>
+            <a:r>
+              <a:rPr sz="2000" b="1"/>
+              <a:t>[X variable]</a:t>
+            </a:r>
+            <a:r>
+              <a:rPr sz="2000"/>
+              <a:t> as my predictor and </a:t>
+            </a:r>
+            <a:r>
+              <a:rPr sz="2000" b="1"/>
+              <a:t>[Y variable]</a:t>
+            </a:r>
+            <a:r>
+              <a:rPr sz="2000"/>
+              <a:t> as my response. My research question is: </a:t>
+            </a:r>
+            <a:r>
+              <a:rPr sz="2000" b="1"/>
+              <a:t>[your question in plain English]</a:t>
+            </a:r>
+            <a:r>
+              <a:rPr sz="2000"/>
+              <a:t>. My null hypothesis is that </a:t>
+            </a:r>
+            <a:r>
+              <a:rPr sz="2000" b="1"/>
+              <a:t>[H₀ in one sentence]</a:t>
+            </a:r>
+            <a:r>
+              <a:rPr sz="2000"/>
+              <a:t>, and my alternate hypothesis is that </a:t>
+            </a:r>
+            <a:r>
+              <a:rPr sz="2000" b="1"/>
+              <a:t>[Hₐ in one sentence]</a:t>
+            </a:r>
+            <a:r>
+              <a:rPr sz="2000"/>
+              <a:t>. I plan to use </a:t>
+            </a:r>
+            <a:r>
+              <a:rPr sz="2000" b="1"/>
+              <a:t>[regression / t-test / ANOVA / other]</a:t>
+            </a:r>
+            <a:r>
+              <a:rPr sz="2000"/>
+              <a:t> to test this. I have confirmed I can load this file into R using </a:t>
+            </a:r>
+            <a:r>
+              <a:rPr sz="2000">
+                <a:latin typeface="Courier"/>
+              </a:rPr>
+              <a:t>read_csv()</a:t>
+            </a:r>
+            <a:r>
+              <a:rPr sz="2000"/>
+              <a:t> [or describe what function you used].”</a:t>
+            </a:r>
+          </a:p>
+        </p:txBody>
+      </p:sp>
+      <p:sp>
+        <p:nvSpPr>
+          <p:cNvPr id="4" name="Content Placeholder 3"/>
+          <p:cNvSpPr>
+            <a:spLocks noGrp="1"/>
+          </p:cNvSpPr>
+          <p:nvPr>
+            <p:ph idx="2" sz="half"/>
+          </p:nvPr>
+        </p:nvSpPr>
+        <p:spPr/>
+        <p:txBody>
+          <a:bodyPr/>
+          <a:lstStyle/>
+          <a:p>
+            <a:pPr lvl="0" indent="0" marL="0">
+              <a:buNone/>
+            </a:pPr>
+            <a:r>
+              <a:rPr b="1"/>
+              <a:t>What happens after you submit:</a:t>
+            </a:r>
+          </a:p>
+          <a:p>
+            <a:pPr lvl="0"/>
+            <a:r>
+              <a:rPr/>
+              <a:t>I read all M1 proposals within 48 hours</a:t>
+            </a:r>
+          </a:p>
+          <a:p>
+            <a:pPr lvl="0"/>
+            <a:r>
+              <a:rPr/>
+              <a:t>I reply with one of:</a:t>
+            </a:r>
+          </a:p>
+          <a:p>
+            <a:pPr lvl="1"/>
+            <a:r>
+              <a:rPr/>
+              <a:t>✅ </a:t>
+            </a:r>
+            <a:r>
+              <a:rPr b="1"/>
+              <a:t>Approved</a:t>
+            </a:r>
+            <a:r>
+              <a:rPr/>
+              <a:t> — proceed to M2</a:t>
+            </a:r>
+          </a:p>
+          <a:p>
+            <a:pPr lvl="1"/>
+            <a:r>
+              <a:rPr/>
+              <a:t>🔄 </a:t>
+            </a:r>
+            <a:r>
+              <a:rPr b="1"/>
+              <a:t>Revise</a:t>
+            </a:r>
+            <a:r>
+              <a:rPr/>
+              <a:t> — one specific thing to change, resubmit by [date]</a:t>
+            </a:r>
+          </a:p>
+          <a:p>
+            <a:pPr lvl="1"/>
+            <a:r>
+              <a:rPr/>
+              <a:t>❌ </a:t>
+            </a:r>
+            <a:r>
+              <a:rPr b="1"/>
+              <a:t>Not viable</a:t>
+            </a:r>
+            <a:r>
+              <a:rPr/>
+              <a:t> — I’ll suggest an alternative source</a:t>
+            </a:r>
+          </a:p>
+          <a:p>
+            <a:pPr lvl="0" indent="0" marL="0">
+              <a:buNone/>
+            </a:pPr>
+            <a:r>
+              <a:rPr/>
+              <a:t>Most proposals get approved. The revision requests are almost always about the hypothesis being too vague.</a:t>
             </a:r>
           </a:p>
         </p:txBody>
@@ -4410,7 +6114,7 @@
             </a:pPr>
             <a:r>
               <a:rPr/>
-              <a:t>Find Your Own Data</a:t>
+              <a:t>Where We Left Off (Lectures 13–14)</a:t>
             </a:r>
           </a:p>
         </p:txBody>
@@ -4430,217 +6134,105 @@
           <a:bodyPr/>
           <a:lstStyle/>
           <a:p>
-            <a:pPr lvl="0" indent="0" marL="0">
-              <a:spcBef>
-                <a:spcPts val="3000"/>
-              </a:spcBef>
-              <a:buNone/>
-            </a:pPr>
-            <a:r>
-              <a:rPr b="1"/>
-              <a:t>Recap from the lecture</a:t>
-            </a:r>
-          </a:p>
-          <a:p>
-            <a:pPr lvl="0"/>
-            <a:r>
-              <a:rPr/>
-              <a:t>The final project has </a:t>
-            </a:r>
-            <a:r>
-              <a:rPr b="1"/>
-              <a:t>four deliverables</a:t>
-            </a:r>
-            <a:r>
-              <a:rPr/>
-              <a:t>: a question (H₀/Hₐ), data loaded in R, a reproducible Quarto write-up, and a short presentation</a:t>
-            </a:r>
-          </a:p>
-          <a:p>
-            <a:pPr lvl="0"/>
-            <a:r>
-              <a:rPr/>
-              <a:t>A good dataset has </a:t>
-            </a:r>
-            <a:r>
-              <a:rPr b="1"/>
-              <a:t>≥ 50 rows</a:t>
-            </a:r>
-            <a:r>
-              <a:rPr/>
-              <a:t>, </a:t>
-            </a:r>
-            <a:r>
-              <a:rPr b="1"/>
-              <a:t>≥ 3 variables</a:t>
-            </a:r>
-            <a:r>
-              <a:rPr/>
-              <a:t>, a </a:t>
-            </a:r>
-            <a:r>
-              <a:rPr b="1"/>
-              <a:t>numeric Y</a:t>
-            </a:r>
-            <a:r>
-              <a:rPr/>
-              <a:t>, and at least one </a:t>
-            </a:r>
-            <a:r>
-              <a:rPr b="1"/>
-              <a:t>X predictor</a:t>
-            </a:r>
-          </a:p>
-          <a:p>
-            <a:pPr lvl="0"/>
-            <a:r>
-              <a:rPr/>
-              <a:t>A good question can be written as </a:t>
-            </a:r>
-            <a:r>
-              <a:rPr b="1"/>
-              <a:t>H₀ and Hₐ in one sentence each</a:t>
-            </a:r>
-          </a:p>
-          <a:p>
-            <a:pPr lvl="0"/>
-            <a:r>
-              <a:rPr/>
-              <a:t>You size up a dataset in R with </a:t>
-            </a:r>
-            <a:r>
-              <a:rPr>
+            <a:pPr lvl="0"/>
+            <a:r>
+              <a:rPr b="1">
                 <a:latin typeface="Courier"/>
               </a:rPr>
-              <a:t>read_csv()</a:t>
-            </a:r>
-            <a:r>
-              <a:rPr/>
-              <a:t>, </a:t>
-            </a:r>
-            <a:r>
-              <a:rPr>
+              <a:t>lm(Y ~ X)</a:t>
+            </a:r>
+            <a:r>
+              <a:rPr/>
+              <a:t> — the same linear model tool, used for both regression and ANOVA</a:t>
+            </a:r>
+          </a:p>
+          <a:p>
+            <a:pPr lvl="0"/>
+            <a:r>
+              <a:rPr b="1"/>
+              <a:t>One-way ANOVA</a:t>
+            </a:r>
+            <a:r>
+              <a:rPr/>
+              <a:t> — compared body mass across three penguin species</a:t>
+            </a:r>
+          </a:p>
+          <a:p>
+            <a:pPr lvl="0"/>
+            <a:r>
+              <a:rPr b="1">
                 <a:latin typeface="Courier"/>
               </a:rPr>
-              <a:t>glimpse()</a:t>
-            </a:r>
-            <a:r>
-              <a:rPr/>
-              <a:t>, </a:t>
-            </a:r>
-            <a:r>
-              <a:rPr>
+              <a:t>plot(model)</a:t>
+            </a:r>
+            <a:r>
+              <a:rPr/>
+              <a:t> — checked assumptions with base R’s four diagnostic panels</a:t>
+            </a:r>
+          </a:p>
+          <a:p>
+            <a:pPr lvl="0"/>
+            <a:r>
+              <a:rPr b="1">
                 <a:latin typeface="Courier"/>
               </a:rPr>
-              <a:t>dim()</a:t>
-            </a:r>
-            <a:r>
-              <a:rPr/>
-              <a:t>, and </a:t>
-            </a:r>
-            <a:r>
-              <a:rPr>
-                <a:latin typeface="Courier"/>
-              </a:rPr>
-              <a:t>head()</a:t>
-            </a:r>
-          </a:p>
-          <a:p>
-            <a:pPr lvl="0" indent="0" marL="0">
-              <a:spcBef>
-                <a:spcPts val="3000"/>
-              </a:spcBef>
+              <a:t>emmeans</a:t>
+            </a:r>
+            <a:r>
+              <a:rPr b="1"/>
+              <a:t> post-hoc</a:t>
+            </a:r>
+            <a:r>
+              <a:rPr/>
+              <a:t> — found </a:t>
+            </a:r>
+            <a:r>
+              <a:rPr i="1"/>
+              <a:t>which</a:t>
+            </a:r>
+            <a:r>
+              <a:rPr/>
+              <a:t> groups differed, not just </a:t>
+            </a:r>
+            <a:r>
+              <a:rPr i="1"/>
+              <a:t>whether</a:t>
+            </a:r>
+          </a:p>
+          <a:p>
+            <a:pPr lvl="0" indent="0" marL="1270000">
               <a:buNone/>
             </a:pPr>
             <a:r>
               <a:rPr sz="2000" b="1"/>
-              <a:t>How to use this worksheet</a:t>
-            </a:r>
-          </a:p>
-          <a:p>
-            <a:pPr lvl="0"/>
+              <a:t>Note</a:t>
+            </a:r>
+          </a:p>
+          <a:p>
+            <a:pPr lvl="0" indent="0" marL="1270000">
+              <a:buNone/>
+            </a:pPr>
+            <a:r>
+              <a:rPr sz="2000" b="1"/>
+              <a:t>✅ Transition</a:t>
+            </a:r>
+          </a:p>
+          <a:p>
+            <a:pPr lvl="0" indent="0" marL="1270000">
+              <a:buNone/>
+            </a:pPr>
             <a:r>
               <a:rPr sz="2000"/>
-              <a:t>Work through the parts in order — each one feeds your Milestone 1 paragraph at the end.</a:t>
-            </a:r>
-          </a:p>
-          <a:p>
-            <a:pPr lvl="0"/>
-            <a:r>
-              <a:rPr sz="2000"/>
-              <a:t>Blocks marked </a:t>
-            </a:r>
+              <a:t>Every dataset we’ve used so far — leaf morphology, Cisco fish, Duluth weather, Palmer penguins — was handed to you.</a:t>
+            </a:r>
+          </a:p>
+          <a:p>
+            <a:pPr lvl="0" indent="0" marL="1270000">
+              <a:buNone/>
+            </a:pPr>
             <a:r>
               <a:rPr sz="2000" b="1"/>
-              <a:t>▶ Adapt this</a:t>
-            </a:r>
-            <a:r>
-              <a:rPr sz="2000"/>
-              <a:t> are code templates: change the file path / column names to </a:t>
-            </a:r>
-            <a:r>
-              <a:rPr sz="2000" i="1"/>
-              <a:t>your</a:t>
-            </a:r>
-            <a:r>
-              <a:rPr sz="2000"/>
-              <a:t> dataset and run them.</a:t>
-            </a:r>
-          </a:p>
-          <a:p>
-            <a:pPr lvl="0"/>
-            <a:r>
-              <a:rPr sz="2000"/>
-              <a:t>Blocks marked </a:t>
-            </a:r>
-            <a:r>
-              <a:rPr sz="2000" b="1"/>
-              <a:t>✏️ Your turn</a:t>
-            </a:r>
-            <a:r>
-              <a:rPr sz="2000"/>
-              <a:t> ask you to write, decide, or interpret.</a:t>
-            </a:r>
-          </a:p>
-          <a:p>
-            <a:pPr lvl="0"/>
-            <a:r>
-              <a:rPr sz="2000"/>
-              <a:t>The </a:t>
-            </a:r>
-            <a:r>
-              <a:rPr sz="2000" b="1"/>
-              <a:t>Going further</a:t>
-            </a:r>
-            <a:r>
-              <a:rPr sz="2000"/>
-              <a:t> section is optional.</a:t>
-            </a:r>
-          </a:p>
-          <a:p>
-            <a:pPr lvl="0" indent="0" marL="1270000">
-              <a:buNone/>
-            </a:pPr>
-            <a:r>
-              <a:rPr sz="2000" b="1"/>
-              <a:t>🔮 Predict before you run — and type, don’t paste</a:t>
-            </a:r>
-          </a:p>
-          <a:p>
-            <a:pPr lvl="0" indent="0" marL="1270000">
-              <a:buNone/>
-            </a:pPr>
-            <a:r>
-              <a:rPr sz="2000"/>
-              <a:t>Before you run any code block on your dataset, </a:t>
-            </a:r>
-            <a:r>
-              <a:rPr sz="2000" i="1"/>
-              <a:t>predict</a:t>
-            </a:r>
-            <a:r>
-              <a:rPr sz="2000"/>
-              <a:t> what you’ll see: how many rows? which columns are numeric? Then run it and compare. Guessing first turns “looking at data” into actually understanding it — and typing the code yourself (rather than pasting) builds the habits that make Milestones 2–5 fast.</a:t>
+              <a:t>Today you start finding your own — data you will clean and analyze yourself.</a:t>
             </a:r>
           </a:p>
         </p:txBody>
@@ -4680,8 +6272,11 @@
         <p:spPr>
           <a:xfrm>
             <a:off x="0" y="0"/>
-            <a:ext cx="9144000" cy="582780"/>
+            <a:ext cx="9144000" cy="602780"/>
           </a:xfrm>
+          <a:solidFill>
+            <a:srgbClr val="1A1A2E"/>
+          </a:solidFill>
         </p:spPr>
         <p:txBody>
           <a:bodyPr/>
@@ -4692,7 +6287,7 @@
             </a:pPr>
             <a:r>
               <a:rPr/>
-              <a:t>Part 1 · Claim a topic</a:t>
+              <a:t>Goals for Today</a:t>
             </a:r>
           </a:p>
         </p:txBody>
@@ -4704,7 +6299,7 @@
             <a:spLocks noGrp="1"/>
           </p:cNvSpPr>
           <p:nvPr>
-            <p:ph idx="1"/>
+            <p:ph idx="1" sz="half"/>
           </p:nvPr>
         </p:nvSpPr>
         <p:spPr/>
@@ -4712,12 +6307,122 @@
           <a:bodyPr/>
           <a:lstStyle/>
           <a:p>
+            <a:pPr lvl="0"/>
+            <a:r>
+              <a:rPr/>
+              <a:t>Understand what makes a </a:t>
+            </a:r>
+            <a:r>
+              <a:rPr b="1"/>
+              <a:t>good final project dataset</a:t>
+            </a:r>
+            <a:r>
+              <a:rPr/>
+              <a:t> and question</a:t>
+            </a:r>
+          </a:p>
+          <a:p>
+            <a:pPr lvl="0"/>
+            <a:r>
+              <a:rPr/>
+              <a:t>See a gallery of data sources — serious ecology/science </a:t>
+            </a:r>
+            <a:r>
+              <a:rPr b="1"/>
+              <a:t>and</a:t>
+            </a:r>
+            <a:r>
+              <a:rPr/>
+              <a:t> fun cryptid options</a:t>
+            </a:r>
+          </a:p>
+          <a:p>
+            <a:pPr lvl="0"/>
+            <a:r>
+              <a:rPr/>
+              <a:t>Learn the </a:t>
+            </a:r>
+            <a:r>
+              <a:rPr b="1"/>
+              <a:t>project milestone structure</a:t>
+            </a:r>
+            <a:r>
+              <a:rPr/>
+              <a:t> — five deliverables spread over the next five weeks</a:t>
+            </a:r>
+          </a:p>
+          <a:p>
+            <a:pPr lvl="0"/>
+            <a:r>
+              <a:rPr/>
+              <a:t>Understand what each milestone requires before you submit</a:t>
+            </a:r>
+          </a:p>
+          <a:p>
+            <a:pPr lvl="0"/>
+            <a:r>
+              <a:rPr/>
+              <a:t>Leave today with at least </a:t>
+            </a:r>
+            <a:r>
+              <a:rPr b="1"/>
+              <a:t>three dataset candidates</a:t>
+            </a:r>
+            <a:r>
+              <a:rPr/>
+              <a:t> in mind</a:t>
+            </a:r>
+          </a:p>
+          <a:p>
+            <a:pPr lvl="0" indent="0" marL="1270000">
+              <a:buNone/>
+            </a:pPr>
+            <a:r>
+              <a:rPr sz="2000" b="1"/>
+              <a:t>Tip</a:t>
+            </a:r>
+          </a:p>
+          <a:p>
+            <a:pPr lvl="0" indent="0" marL="1270000">
+              <a:buNone/>
+            </a:pPr>
+            <a:r>
+              <a:rPr sz="2000" b="1"/>
+              <a:t>🖐 Today’s action</a:t>
+            </a:r>
+          </a:p>
+          <a:p>
+            <a:pPr lvl="0" indent="0" marL="1270000">
+              <a:buNone/>
+            </a:pPr>
+            <a:r>
+              <a:rPr sz="2000"/>
+              <a:t>Before you leave, write down one dataset you’re seriously considering and the question you’d ask with it.</a:t>
+            </a:r>
+          </a:p>
+        </p:txBody>
+      </p:sp>
+      <p:sp>
+        <p:nvSpPr>
+          <p:cNvPr id="4" name="Content Placeholder 3"/>
+          <p:cNvSpPr>
+            <a:spLocks noGrp="1"/>
+          </p:cNvSpPr>
+          <p:nvPr>
+            <p:ph idx="2" sz="half"/>
+          </p:nvPr>
+        </p:nvSpPr>
+        <p:spPr/>
+        <p:txBody>
+          <a:bodyPr/>
+          <a:lstStyle/>
+          <a:p>
             <a:pPr lvl="0" indent="0" marL="0">
               <a:buNone/>
             </a:pPr>
             <a:r>
-              <a:rPr/>
-              <a:t>Before you look at any data, decide what you actually care about. You are far more likely to finish a project on a topic you find interesting.</a:t>
+              <a:rPr b="1"/>
+              <a:t>No new R code today.</a:t>
             </a:r>
           </a:p>
           <a:p>
@@ -4726,27 +6431,39 @@
             </a:pPr>
             <a:r>
               <a:rPr/>
-              <a:t>✏️ </a:t>
-            </a:r>
-            <a:r>
-              <a:rPr b="1"/>
-              <a:t>Your turn:</a:t>
-            </a:r>
-            <a:r>
-              <a:rPr/>
-              <a:t> Write one topic you can’t stop thinking about, and a first guess at a question.</a:t>
-            </a:r>
-          </a:p>
-          <a:p>
-            <a:pPr lvl="0" indent="0">
-              <a:buNone/>
-            </a:pPr>
+              <a:t>This lecture is about </a:t>
+            </a:r>
+            <a:r>
+              <a:rPr i="1"/>
+              <a:t>thinking like a data scientist</a:t>
+            </a:r>
+            <a:r>
+              <a:rPr/>
+              <a:t> — asking a question first, then finding the data that can answer it.</a:t>
+            </a:r>
+          </a:p>
+          <a:p>
+            <a:pPr lvl="0" indent="0" marL="0">
+              <a:buNone/>
+            </a:pPr>
+            <a:r>
+              <a:rPr/>
+              <a:t>📖 R4DS Ch. 1 — </a:t>
+            </a:r>
             <a:r>
               <a:rPr>
-                <a:latin typeface="Courier"/>
+                <a:hlinkClick r:id="rId2"/>
               </a:rPr>
-              <a:t>Topic:
-A rough question about it:</a:t>
+              <a:t>The whole game</a:t>
+            </a:r>
+          </a:p>
+          <a:p>
+            <a:pPr lvl="0" indent="0" marL="1270000">
+              <a:buNone/>
+            </a:pPr>
+            <a:r>
+              <a:rPr sz="2000" i="1"/>
+              <a:t>“The best dataset is the one you can’t stop thinking about.”</a:t>
             </a:r>
           </a:p>
         </p:txBody>
@@ -4786,8 +6503,11 @@
         <p:spPr>
           <a:xfrm>
             <a:off x="0" y="0"/>
-            <a:ext cx="9144000" cy="582780"/>
+            <a:ext cx="9144000" cy="602780"/>
           </a:xfrm>
+          <a:solidFill>
+            <a:srgbClr val="1A1A2E"/>
+          </a:solidFill>
         </p:spPr>
         <p:txBody>
           <a:bodyPr/>
@@ -4798,7 +6518,7 @@
             </a:pPr>
             <a:r>
               <a:rPr/>
-              <a:t>Part 2 · Visit three data sources</a:t>
+              <a:t>What Is the Final Project?</a:t>
             </a:r>
           </a:p>
         </p:txBody>
@@ -4810,7 +6530,7 @@
             <a:spLocks noGrp="1"/>
           </p:cNvSpPr>
           <p:nvPr>
-            <p:ph idx="1"/>
+            <p:ph idx="1" sz="half"/>
           </p:nvPr>
         </p:nvSpPr>
         <p:spPr/>
@@ -4823,15 +6543,93 @@
             </a:pPr>
             <a:r>
               <a:rPr/>
-              <a:t>Open </a:t>
-            </a:r>
-            <a:r>
-              <a:rPr b="1"/>
-              <a:t>three</a:t>
-            </a:r>
-            <a:r>
-              <a:rPr/>
-              <a:t> of these in your browser and skim what they offer. Aim for at least one that could feed your topic from Part 1.</a:t>
+              <a:t>Over the next five weeks you will work independently on a dataset of your choice. The final product is a </a:t>
+            </a:r>
+            <a:r>
+              <a:rPr b="1"/>
+              <a:t>reproducible report</a:t>
+            </a:r>
+            <a:r>
+              <a:rPr/>
+              <a:t> that includes:</a:t>
+            </a:r>
+          </a:p>
+          <a:p>
+            <a:pPr lvl="0"/>
+            <a:r>
+              <a:rPr/>
+              <a:t>A clear </a:t>
+            </a:r>
+            <a:r>
+              <a:rPr b="1"/>
+              <a:t>biological or scientific question</a:t>
+            </a:r>
+          </a:p>
+          <a:p>
+            <a:pPr lvl="0"/>
+            <a:r>
+              <a:rPr/>
+              <a:t>Data downloaded or imported </a:t>
+            </a:r>
+            <a:r>
+              <a:rPr b="1"/>
+              <a:t>in R</a:t>
+            </a:r>
+            <a:r>
+              <a:rPr/>
+              <a:t> (no Excel pre-processing)</a:t>
+            </a:r>
+          </a:p>
+          <a:p>
+            <a:pPr lvl="0"/>
+            <a:r>
+              <a:rPr b="1"/>
+              <a:t>Exploratory visualizations</a:t>
+            </a:r>
+            <a:r>
+              <a:rPr/>
+              <a:t> — raw plots, summaries, distributions</a:t>
+            </a:r>
+          </a:p>
+          <a:p>
+            <a:pPr lvl="0"/>
+            <a:r>
+              <a:rPr/>
+              <a:t>At least </a:t>
+            </a:r>
+            <a:r>
+              <a:rPr b="1"/>
+              <a:t>one statistical analysis</a:t>
+            </a:r>
+            <a:r>
+              <a:rPr/>
+              <a:t> appropriate to your question (regression, t-test, ANOVA, or similar)</a:t>
+            </a:r>
+          </a:p>
+          <a:p>
+            <a:pPr lvl="0"/>
+            <a:r>
+              <a:rPr b="1"/>
+              <a:t>Assumption checks</a:t>
+            </a:r>
+            <a:r>
+              <a:rPr/>
+              <a:t> on your statistical model</a:t>
+            </a:r>
+          </a:p>
+          <a:p>
+            <a:pPr lvl="0"/>
+            <a:r>
+              <a:rPr/>
+              <a:t>A short </a:t>
+            </a:r>
+            <a:r>
+              <a:rPr b="1"/>
+              <a:t>written interpretation</a:t>
+            </a:r>
+            <a:r>
+              <a:rPr/>
+              <a:t> of your results</a:t>
             </a:r>
           </a:p>
           <a:p>
@@ -4839,87 +6637,62 @@
               <a:buNone/>
             </a:pPr>
             <a:r>
-              <a:rPr b="1"/>
-              <a:t>Ecology / environment:</a:t>
-            </a:r>
-            <a:r>
-              <a:rPr/>
-              <a:t> GBIF </a:t>
-            </a:r>
-            <a:r>
-              <a:rPr>
-                <a:latin typeface="Courier"/>
-              </a:rPr>
-              <a:t>gbif.org</a:t>
-            </a:r>
-            <a:r>
-              <a:rPr/>
-              <a:t> · EDI </a:t>
-            </a:r>
-            <a:r>
-              <a:rPr>
-                <a:latin typeface="Courier"/>
-              </a:rPr>
-              <a:t>edirepository.org</a:t>
-            </a:r>
-            <a:r>
-              <a:rPr/>
-              <a:t> · NEON </a:t>
-            </a:r>
-            <a:r>
-              <a:rPr>
-                <a:latin typeface="Courier"/>
-              </a:rPr>
-              <a:t>data.neonscience.org</a:t>
-            </a:r>
-            <a:r>
-              <a:rPr/>
-              <a:t> · Dryad </a:t>
-            </a:r>
-            <a:r>
-              <a:rPr>
-                <a:latin typeface="Courier"/>
-              </a:rPr>
-              <a:t>datadryad.org</a:t>
-            </a:r>
-            <a:r>
-              <a:rPr/>
-              <a:t> · NOAA-GLERL ice </a:t>
-            </a:r>
-            <a:r>
-              <a:rPr>
-                <a:latin typeface="Courier"/>
-              </a:rPr>
-              <a:t>glerl.noaa.gov/data/ice</a:t>
-            </a:r>
-            <a:r>
-              <a:rPr/>
-              <a:t> · eBird </a:t>
-            </a:r>
-            <a:r>
-              <a:rPr>
-                <a:latin typeface="Courier"/>
-              </a:rPr>
-              <a:t>ebird.org/science</a:t>
-            </a:r>
-          </a:p>
+              <a:rPr/>
+              <a:t>This is exactly the workflow you’ve been building all semester — applied to something </a:t>
+            </a:r>
+            <a:r>
+              <a:rPr i="1"/>
+              <a:t>you</a:t>
+            </a:r>
+            <a:r>
+              <a:rPr/>
+              <a:t> care about.</a:t>
+            </a:r>
+          </a:p>
+        </p:txBody>
+      </p:sp>
+      <p:sp>
+        <p:nvSpPr>
+          <p:cNvPr id="4" name="Content Placeholder 3"/>
+          <p:cNvSpPr>
+            <a:spLocks noGrp="1"/>
+          </p:cNvSpPr>
+          <p:nvPr>
+            <p:ph idx="2" sz="half"/>
+          </p:nvPr>
+        </p:nvSpPr>
+        <p:spPr/>
+        <p:txBody>
+          <a:bodyPr/>
+          <a:lstStyle/>
           <a:p>
             <a:pPr lvl="0" indent="0" marL="0">
               <a:buNone/>
             </a:pPr>
             <a:r>
               <a:rPr b="1"/>
-              <a:t>Fun / engaging:</a:t>
-            </a:r>
-            <a:r>
-              <a:rPr/>
-              <a:t> Bigfoot, UFO, Coffee, Video-game sales — all on </a:t>
-            </a:r>
-            <a:r>
-              <a:rPr>
-                <a:latin typeface="Courier"/>
-              </a:rPr>
-              <a:t>kaggle.com/datasets</a:t>
+              <a:t>What you are NOT required to do:</a:t>
+            </a:r>
+          </a:p>
+          <a:p>
+            <a:pPr lvl="0"/>
+            <a:r>
+              <a:rPr/>
+              <a:t>Find a perfect, spotless dataset (messy is fine — cleaning is a skill)</a:t>
+            </a:r>
+          </a:p>
+          <a:p>
+            <a:pPr lvl="0"/>
+            <a:r>
+              <a:rPr/>
+              <a:t>Do something no one has ever done before, with novel data or methods</a:t>
+            </a:r>
+          </a:p>
+          <a:p>
+            <a:pPr lvl="0"/>
+            <a:r>
+              <a:rPr/>
+              <a:t>Use more than one analysis method</a:t>
             </a:r>
           </a:p>
           <a:p>
@@ -4928,77 +6701,40 @@
             </a:pPr>
             <a:r>
               <a:rPr b="1"/>
-              <a:t>General:</a:t>
-            </a:r>
-            <a:r>
-              <a:rPr/>
-              <a:t> Our World in Data </a:t>
-            </a:r>
-            <a:r>
-              <a:rPr>
-                <a:latin typeface="Courier"/>
-              </a:rPr>
-              <a:t>ourworldindata.org</a:t>
-            </a:r>
-            <a:r>
-              <a:rPr/>
-              <a:t> · FiveThirtyEight </a:t>
-            </a:r>
-            <a:r>
-              <a:rPr>
-                <a:latin typeface="Courier"/>
-              </a:rPr>
-              <a:t>github.com/fivethirtyeight/data</a:t>
-            </a:r>
-            <a:r>
-              <a:rPr/>
-              <a:t> · Bike Sharing </a:t>
-            </a:r>
-            <a:r>
-              <a:rPr>
-                <a:latin typeface="Courier"/>
-              </a:rPr>
-              <a:t>archive.ics.uci.edu</a:t>
-            </a:r>
-            <a:r>
-              <a:rPr/>
-              <a:t> · Google Dataset Search </a:t>
-            </a:r>
-            <a:r>
-              <a:rPr>
-                <a:latin typeface="Courier"/>
-              </a:rPr>
-              <a:t>datasetsearch.research.google.com</a:t>
-            </a:r>
-          </a:p>
-          <a:p>
-            <a:pPr lvl="0" indent="0" marL="0">
-              <a:buNone/>
-            </a:pPr>
-            <a:r>
-              <a:rPr/>
-              <a:t>✏️ </a:t>
-            </a:r>
-            <a:r>
-              <a:rPr b="1"/>
-              <a:t>Your turn:</a:t>
-            </a:r>
-            <a:r>
-              <a:rPr/>
-              <a:t> List the three you visited and one dataset that caught your eye at each.</a:t>
-            </a:r>
-          </a:p>
-          <a:p>
-            <a:pPr lvl="0" indent="0">
-              <a:buNone/>
-            </a:pPr>
-            <a:r>
-              <a:rPr>
-                <a:latin typeface="Courier"/>
-              </a:rPr>
-              <a:t>Source 1:                     Dataset / idea:
-Source 2:                     Dataset / idea:
-Source 3:                     Dataset / idea:</a:t>
+              <a:t>What you ARE required to do:</a:t>
+            </a:r>
+          </a:p>
+          <a:p>
+            <a:pPr lvl="0"/>
+            <a:r>
+              <a:rPr/>
+              <a:t>Have a dataset with at least </a:t>
+            </a:r>
+            <a:r>
+              <a:rPr b="1"/>
+              <a:t>50 rows</a:t>
+            </a:r>
+            <a:r>
+              <a:rPr/>
+              <a:t> and at least </a:t>
+            </a:r>
+            <a:r>
+              <a:rPr b="1"/>
+              <a:t>3 variables</a:t>
+            </a:r>
+          </a:p>
+          <a:p>
+            <a:pPr lvl="0"/>
+            <a:r>
+              <a:rPr/>
+              <a:t>Be able to state your hypothesis as H₀ and Hₐ before you analyze</a:t>
+            </a:r>
+          </a:p>
+          <a:p>
+            <a:pPr lvl="0"/>
+            <a:r>
+              <a:rPr/>
+              <a:t>Submit every milestone on time — partial credit only if submitted</a:t>
             </a:r>
           </a:p>
         </p:txBody>
@@ -5038,8 +6774,11 @@
         <p:spPr>
           <a:xfrm>
             <a:off x="0" y="0"/>
-            <a:ext cx="9144000" cy="582780"/>
+            <a:ext cx="9144000" cy="602780"/>
           </a:xfrm>
+          <a:solidFill>
+            <a:srgbClr val="1A1A2E"/>
+          </a:solidFill>
         </p:spPr>
         <p:txBody>
           <a:bodyPr/>
@@ -5050,20 +6789,334 @@
             </a:pPr>
             <a:r>
               <a:rPr/>
-              <a:t>Part 3 · Download one candidate</a:t>
-            </a:r>
-          </a:p>
-        </p:txBody>
-      </p:sp>
-      <p:sp>
-        <p:nvSpPr>
-          <p:cNvPr id="3" name="Content Placeholder 2"/>
-          <p:cNvSpPr>
-            <a:spLocks noGrp="1"/>
-          </p:cNvSpPr>
+              <a:t>The Five Milestones</a:t>
+            </a:r>
+          </a:p>
+        </p:txBody>
+      </p:sp>
+      <p:graphicFrame>
+        <p:nvGraphicFramePr>
+          <p:cNvPr id="6" name="Content Placeholder 5"/>
+          <p:cNvGraphicFramePr>
+            <a:graphicFrameLocks noGrp="1"/>
+          </p:cNvGraphicFramePr>
           <p:nvPr>
             <p:ph idx="1"/>
           </p:nvPr>
+        </p:nvGraphicFramePr>
+        <p:xfrm>
+          <a:off x="0" y="660400"/>
+          <a:ext cx="4191000" cy="3810000"/>
+        </p:xfrm>
+        <a:graphic>
+          <a:graphicData uri="http://schemas.openxmlformats.org/drawingml/2006/table">
+            <a:tbl>
+              <a:tblPr firstRow="1" bandRow="1">
+                <a:tableStyleId>{5C22544A-7EE6-4342-B048-85BDC9FD1C3A}</a:tableStyleId>
+              </a:tblPr>
+              <a:tblGrid>
+                <a:gridCol w="1397000"/>
+                <a:gridCol w="1397000"/>
+                <a:gridCol w="1397000"/>
+              </a:tblGrid>
+              <a:tr h="0">
+                <a:tc>
+                  <a:txBody>
+                    <a:bodyPr/>
+                    <a:lstStyle/>
+                    <a:p>
+                      <a:pPr lvl="0" indent="0" marL="0">
+                        <a:buNone/>
+                      </a:pPr>
+                      <a:r>
+                        <a:rPr/>
+                        <a:t>#</a:t>
+                      </a:r>
+                    </a:p>
+                  </a:txBody>
+                  <a:tcPr/>
+                </a:tc>
+                <a:tc>
+                  <a:txBody>
+                    <a:bodyPr/>
+                    <a:lstStyle/>
+                    <a:p>
+                      <a:pPr lvl="0" indent="0" marL="0">
+                        <a:buNone/>
+                      </a:pPr>
+                      <a:r>
+                        <a:rPr/>
+                        <a:t>What’s due</a:t>
+                      </a:r>
+                    </a:p>
+                  </a:txBody>
+                  <a:tcPr/>
+                </a:tc>
+                <a:tc>
+                  <a:txBody>
+                    <a:bodyPr/>
+                    <a:lstStyle/>
+                    <a:p>
+                      <a:pPr lvl="0" indent="0" marL="0">
+                        <a:buNone/>
+                      </a:pPr>
+                      <a:r>
+                        <a:rPr/>
+                        <a:t>When</a:t>
+                      </a:r>
+                    </a:p>
+                  </a:txBody>
+                  <a:tcPr/>
+                </a:tc>
+              </a:tr>
+              <a:tr h="0">
+                <a:tc>
+                  <a:txBody>
+                    <a:bodyPr/>
+                    <a:lstStyle/>
+                    <a:p>
+                      <a:pPr lvl="0" indent="0" marL="0">
+                        <a:buNone/>
+                      </a:pPr>
+                      <a:r>
+                        <a:rPr b="1"/>
+                        <a:t>M1</a:t>
+                      </a:r>
+                    </a:p>
+                  </a:txBody>
+                </a:tc>
+                <a:tc>
+                  <a:txBody>
+                    <a:bodyPr/>
+                    <a:lstStyle/>
+                    <a:p>
+                      <a:pPr lvl="0" indent="0" marL="0">
+                        <a:buNone/>
+                      </a:pPr>
+                      <a:r>
+                        <a:rPr/>
+                        <a:t>Dataset proposal — 1 paragraph + link</a:t>
+                      </a:r>
+                    </a:p>
+                  </a:txBody>
+                </a:tc>
+                <a:tc>
+                  <a:txBody>
+                    <a:bodyPr/>
+                    <a:lstStyle/>
+                    <a:p>
+                      <a:pPr lvl="0" indent="0" marL="0">
+                        <a:buNone/>
+                      </a:pPr>
+                      <a:r>
+                        <a:rPr b="1"/>
+                        <a:t>DATES</a:t>
+                      </a:r>
+                    </a:p>
+                  </a:txBody>
+                </a:tc>
+              </a:tr>
+              <a:tr h="0">
+                <a:tc>
+                  <a:txBody>
+                    <a:bodyPr/>
+                    <a:lstStyle/>
+                    <a:p>
+                      <a:pPr lvl="0" indent="0" marL="0">
+                        <a:buNone/>
+                      </a:pPr>
+                      <a:r>
+                        <a:rPr b="1"/>
+                        <a:t>M2</a:t>
+                      </a:r>
+                    </a:p>
+                  </a:txBody>
+                </a:tc>
+                <a:tc>
+                  <a:txBody>
+                    <a:bodyPr/>
+                    <a:lstStyle/>
+                    <a:p>
+                      <a:pPr lvl="0" indent="0" marL="0">
+                        <a:buNone/>
+                      </a:pPr>
+                      <a:r>
+                        <a:rPr/>
+                        <a:t>Data in R — loaded, glimpsed, first raw plot</a:t>
+                      </a:r>
+                    </a:p>
+                  </a:txBody>
+                </a:tc>
+                <a:tc>
+                  <a:txBody>
+                    <a:bodyPr/>
+                    <a:lstStyle/>
+                    <a:p>
+                      <a:pPr lvl="0" indent="0" marL="0">
+                        <a:buNone/>
+                      </a:pPr>
+                      <a:r>
+                        <a:rPr b="1"/>
+                        <a:t>DATES</a:t>
+                      </a:r>
+                    </a:p>
+                  </a:txBody>
+                </a:tc>
+              </a:tr>
+              <a:tr h="0">
+                <a:tc>
+                  <a:txBody>
+                    <a:bodyPr/>
+                    <a:lstStyle/>
+                    <a:p>
+                      <a:pPr lvl="0" indent="0" marL="0">
+                        <a:buNone/>
+                      </a:pPr>
+                      <a:r>
+                        <a:rPr b="1"/>
+                        <a:t>M3</a:t>
+                      </a:r>
+                    </a:p>
+                  </a:txBody>
+                </a:tc>
+                <a:tc>
+                  <a:txBody>
+                    <a:bodyPr/>
+                    <a:lstStyle/>
+                    <a:p>
+                      <a:pPr lvl="0" indent="0" marL="0">
+                        <a:buNone/>
+                      </a:pPr>
+                      <a:r>
+                        <a:rPr/>
+                        <a:t>Cleaned data + exploratory figures</a:t>
+                      </a:r>
+                    </a:p>
+                  </a:txBody>
+                </a:tc>
+                <a:tc>
+                  <a:txBody>
+                    <a:bodyPr/>
+                    <a:lstStyle/>
+                    <a:p>
+                      <a:pPr lvl="0" indent="0" marL="0">
+                        <a:buNone/>
+                      </a:pPr>
+                      <a:r>
+                        <a:rPr b="1"/>
+                        <a:t>DATES</a:t>
+                      </a:r>
+                    </a:p>
+                  </a:txBody>
+                </a:tc>
+              </a:tr>
+              <a:tr h="0">
+                <a:tc>
+                  <a:txBody>
+                    <a:bodyPr/>
+                    <a:lstStyle/>
+                    <a:p>
+                      <a:pPr lvl="0" indent="0" marL="0">
+                        <a:buNone/>
+                      </a:pPr>
+                      <a:r>
+                        <a:rPr b="1"/>
+                        <a:t>M4</a:t>
+                      </a:r>
+                    </a:p>
+                  </a:txBody>
+                </a:tc>
+                <a:tc>
+                  <a:txBody>
+                    <a:bodyPr/>
+                    <a:lstStyle/>
+                    <a:p>
+                      <a:pPr lvl="0" indent="0" marL="0">
+                        <a:buNone/>
+                      </a:pPr>
+                      <a:r>
+                        <a:rPr/>
+                        <a:t>Statistical analysis + assumption checks</a:t>
+                      </a:r>
+                    </a:p>
+                  </a:txBody>
+                </a:tc>
+                <a:tc>
+                  <a:txBody>
+                    <a:bodyPr/>
+                    <a:lstStyle/>
+                    <a:p>
+                      <a:pPr lvl="0" indent="0" marL="0">
+                        <a:buNone/>
+                      </a:pPr>
+                      <a:r>
+                        <a:rPr b="1"/>
+                        <a:t>DATES</a:t>
+                      </a:r>
+                    </a:p>
+                  </a:txBody>
+                </a:tc>
+              </a:tr>
+              <a:tr h="0">
+                <a:tc>
+                  <a:txBody>
+                    <a:bodyPr/>
+                    <a:lstStyle/>
+                    <a:p>
+                      <a:pPr lvl="0" indent="0" marL="0">
+                        <a:buNone/>
+                      </a:pPr>
+                      <a:r>
+                        <a:rPr b="1"/>
+                        <a:t>M5</a:t>
+                      </a:r>
+                    </a:p>
+                  </a:txBody>
+                </a:tc>
+                <a:tc>
+                  <a:txBody>
+                    <a:bodyPr/>
+                    <a:lstStyle/>
+                    <a:p>
+                      <a:pPr lvl="0" indent="0" marL="0">
+                        <a:buNone/>
+                      </a:pPr>
+                      <a:r>
+                        <a:rPr/>
+                        <a:t>Final Quarto report, knitted to HTML, presentations.</a:t>
+                      </a:r>
+                    </a:p>
+                  </a:txBody>
+                </a:tc>
+                <a:tc>
+                  <a:txBody>
+                    <a:bodyPr/>
+                    <a:lstStyle/>
+                    <a:p>
+                      <a:pPr lvl="0" indent="0" marL="0">
+                        <a:buNone/>
+                      </a:pPr>
+                      <a:r>
+                        <a:rPr b="1"/>
+                        <a:t>Week Prior to finals</a:t>
+                      </a:r>
+                    </a:p>
+                  </a:txBody>
+                </a:tc>
+              </a:tr>
+            </a:tbl>
+          </a:graphicData>
+        </a:graphic>
+      </p:graphicFrame>
+      <p:sp>
+        <p:nvSpPr>
+          <p:cNvPr id="4" name="Content Placeholder 3"/>
+          <p:cNvSpPr>
+            <a:spLocks noGrp="1"/>
+          </p:cNvSpPr>
+          <p:nvPr>
+            <p:ph idx="2" sz="half"/>
+          </p:nvPr>
         </p:nvSpPr>
         <p:spPr/>
         <p:txBody>
@@ -5074,57 +7127,36 @@
               <a:buNone/>
             </a:pPr>
             <a:r>
-              <a:rPr/>
-              <a:t>Pick your favorite candidate and download it as a </a:t>
-            </a:r>
-            <a:r>
-              <a:rPr b="1"/>
-              <a:t>CSV</a:t>
-            </a:r>
-            <a:r>
-              <a:rPr/>
-              <a:t> (or similar) into your project’s </a:t>
-            </a:r>
-            <a:r>
-              <a:rPr>
-                <a:latin typeface="Courier"/>
-              </a:rPr>
-              <a:t>data/</a:t>
-            </a:r>
-            <a:r>
-              <a:rPr/>
-              <a:t> folder.</a:t>
-            </a:r>
-          </a:p>
-          <a:p>
-            <a:pPr lvl="0" indent="0" marL="0">
-              <a:buNone/>
-            </a:pPr>
-            <a:r>
-              <a:rPr/>
-              <a:t>✏️ </a:t>
-            </a:r>
-            <a:r>
-              <a:rPr b="1"/>
-              <a:t>Your turn:</a:t>
-            </a:r>
-            <a:r>
-              <a:rPr/>
-              <a:t> Record where it came from.</a:t>
-            </a:r>
-          </a:p>
-          <a:p>
-            <a:pPr lvl="0" indent="0">
-              <a:buNone/>
-            </a:pPr>
-            <a:r>
-              <a:rPr>
-                <a:latin typeface="Courier"/>
-              </a:rPr>
-              <a:t>Dataset name:
-Source URL:
-File name saved in data/:
-File type (csv / txt / xlsx):</a:t>
+              <a:rPr b="1"/>
+              <a:t>Why milestones and not one big deadline?</a:t>
+            </a:r>
+          </a:p>
+          <a:p>
+            <a:pPr lvl="0"/>
+            <a:r>
+              <a:rPr/>
+              <a:t>Professional data projects always have checkpoints</a:t>
+            </a:r>
+          </a:p>
+          <a:p>
+            <a:pPr lvl="0"/>
+            <a:r>
+              <a:rPr/>
+              <a:t>It forces you to start — the hardest part of any project</a:t>
+            </a:r>
+          </a:p>
+          <a:p>
+            <a:pPr lvl="0"/>
+            <a:r>
+              <a:rPr/>
+              <a:t>Each piece is graded on its own, so a rough M2 doesn’t sink your M5</a:t>
+            </a:r>
+          </a:p>
+          <a:p>
+            <a:pPr lvl="0"/>
+            <a:r>
+              <a:rPr/>
+              <a:t>You get feedback from me before the next step, not after everything is done</a:t>
             </a:r>
           </a:p>
           <a:p>
@@ -5132,62 +7164,17 @@
               <a:buNone/>
             </a:pPr>
             <a:r>
-              <a:rPr sz="2000"/>
-              <a:t>⚠️ </a:t>
-            </a:r>
-            <a:r>
               <a:rPr sz="2000" b="1"/>
-              <a:t>Watch out!</a:t>
-            </a:r>
-            <a:r>
-              <a:rPr sz="2000"/>
-              <a:t> Start small — filter to </a:t>
-            </a:r>
+              <a:t>Important</a:t>
+            </a:r>
+          </a:p>
+          <a:p>
+            <a:pPr lvl="0" indent="0" marL="1270000">
+              <a:buNone/>
+            </a:pPr>
             <a:r>
               <a:rPr sz="2000" b="1"/>
-              <a:t>CSV</a:t>
-            </a:r>
-            <a:r>
-              <a:rPr sz="2000"/>
-              <a:t> and files </a:t>
-            </a:r>
-            <a:r>
-              <a:rPr sz="2000" b="1"/>
-              <a:t>under 10 MB</a:t>
-            </a:r>
-            <a:r>
-              <a:rPr sz="2000"/>
-              <a:t>. You can always scale up later. If it only downloads as </a:t>
-            </a:r>
-            <a:r>
-              <a:rPr sz="2000">
-                <a:latin typeface="Courier"/>
-              </a:rPr>
-              <a:t>.xlsx</a:t>
-            </a:r>
-            <a:r>
-              <a:rPr sz="2000"/>
-              <a:t>, that’s fine — you’ll use </a:t>
-            </a:r>
-            <a:r>
-              <a:rPr sz="2000">
-                <a:latin typeface="Courier"/>
-              </a:rPr>
-              <a:t>read_excel()</a:t>
-            </a:r>
-            <a:r>
-              <a:rPr sz="2000"/>
-              <a:t> instead of </a:t>
-            </a:r>
-            <a:r>
-              <a:rPr sz="2000">
-                <a:latin typeface="Courier"/>
-              </a:rPr>
-              <a:t>read_csv()</a:t>
-            </a:r>
-            <a:r>
-              <a:rPr sz="2000"/>
-              <a:t>.</a:t>
+              <a:t>M1 is due at the START of DATE_____________.</a:t>
             </a:r>
           </a:p>
         </p:txBody>
@@ -5227,8 +7214,11 @@
         <p:spPr>
           <a:xfrm>
             <a:off x="0" y="0"/>
-            <a:ext cx="9144000" cy="582780"/>
+            <a:ext cx="9144000" cy="602780"/>
           </a:xfrm>
+          <a:solidFill>
+            <a:srgbClr val="1A1A2E"/>
+          </a:solidFill>
         </p:spPr>
         <p:txBody>
           <a:bodyPr/>
@@ -5239,7 +7229,7 @@
             </a:pPr>
             <a:r>
               <a:rPr/>
-              <a:t>Part 4 · Load it and size it up</a:t>
+              <a:t>Milestone 1 — What You Need to Submit</a:t>
             </a:r>
           </a:p>
         </p:txBody>
@@ -5251,7 +7241,7 @@
             <a:spLocks noGrp="1"/>
           </p:cNvSpPr>
           <p:nvPr>
-            <p:ph idx="1"/>
+            <p:ph idx="1" sz="half"/>
           </p:nvPr>
         </p:nvSpPr>
         <p:spPr/>
@@ -5264,255 +7254,188 @@
             </a:pPr>
             <a:r>
               <a:rPr/>
-              <a:t>Now the real test: can you get it into R?</a:t>
-            </a:r>
-          </a:p>
-          <a:p>
-            <a:pPr lvl="0" indent="0" marL="0">
-              <a:buNone/>
-            </a:pPr>
-            <a:r>
-              <a:rPr b="1"/>
-              <a:t>▶ Adapt this</a:t>
-            </a:r>
-            <a:r>
-              <a:rPr/>
-              <a:t> (change the file name to yours):</a:t>
-            </a:r>
-          </a:p>
-          <a:p>
-            <a:pPr lvl="0" indent="0">
-              <a:buNone/>
-            </a:pPr>
-            <a:r>
-              <a:rPr>
-                <a:solidFill>
-                  <a:srgbClr val="5E5E5E"/>
-                </a:solidFill>
-                <a:latin typeface="Courier"/>
-              </a:rPr>
-              <a:t># Load libraries and your candidate dataset --------------</a:t>
-            </a:r>
-            <a:br/>
-            <a:r>
-              <a:rPr>
-                <a:solidFill>
-                  <a:srgbClr val="4758AB"/>
-                </a:solidFill>
-                <a:latin typeface="Courier"/>
-              </a:rPr>
-              <a:t>library</a:t>
-            </a:r>
-            <a:r>
-              <a:rPr>
-                <a:solidFill>
-                  <a:srgbClr val="003B4F"/>
-                </a:solidFill>
-                <a:latin typeface="Courier"/>
-              </a:rPr>
-              <a:t>(tidyverse)</a:t>
-            </a:r>
-            <a:br/>
-            <a:br/>
-            <a:r>
-              <a:rPr>
-                <a:solidFill>
-                  <a:srgbClr val="003B4F"/>
-                </a:solidFill>
-                <a:latin typeface="Courier"/>
-              </a:rPr>
-              <a:t>my_data_df &lt;- </a:t>
-            </a:r>
-            <a:r>
-              <a:rPr>
-                <a:solidFill>
-                  <a:srgbClr val="4758AB"/>
-                </a:solidFill>
-                <a:latin typeface="Courier"/>
-              </a:rPr>
-              <a:t>read_csv</a:t>
-            </a:r>
-            <a:r>
-              <a:rPr>
-                <a:solidFill>
-                  <a:srgbClr val="003B4F"/>
-                </a:solidFill>
-                <a:latin typeface="Courier"/>
-              </a:rPr>
-              <a:t>(</a:t>
-            </a:r>
-            <a:r>
-              <a:rPr>
-                <a:solidFill>
-                  <a:srgbClr val="20794D"/>
-                </a:solidFill>
-                <a:latin typeface="Courier"/>
-              </a:rPr>
-              <a:t>"data/your_file_name.csv"</a:t>
-            </a:r>
-            <a:r>
-              <a:rPr>
-                <a:solidFill>
-                  <a:srgbClr val="003B4F"/>
-                </a:solidFill>
-                <a:latin typeface="Courier"/>
-              </a:rPr>
-              <a:t>)</a:t>
-            </a:r>
-          </a:p>
-          <a:p>
-            <a:pPr lvl="0" indent="0" marL="1270000">
-              <a:buNone/>
-            </a:pPr>
-            <a:r>
-              <a:rPr sz="2000"/>
-              <a:t>🔮 </a:t>
-            </a:r>
-            <a:r>
-              <a:rPr sz="2000" b="1"/>
-              <a:t>Predict first:</a:t>
-            </a:r>
-            <a:r>
-              <a:rPr sz="2000"/>
-              <a:t> before you run the next block, guess how many rows and columns the file has. Write your guess, then check.</a:t>
-            </a:r>
-          </a:p>
-          <a:p>
-            <a:pPr lvl="0" indent="0" marL="0">
-              <a:buNone/>
-            </a:pPr>
-            <a:r>
-              <a:rPr b="1"/>
-              <a:t>▶ Adapt this:</a:t>
-            </a:r>
-          </a:p>
-          <a:p>
-            <a:pPr lvl="0" indent="0">
-              <a:buNone/>
-            </a:pPr>
-            <a:r>
-              <a:rPr>
-                <a:solidFill>
-                  <a:srgbClr val="5E5E5E"/>
-                </a:solidFill>
-                <a:latin typeface="Courier"/>
-              </a:rPr>
-              <a:t># Three-part first look ----------------------------------</a:t>
-            </a:r>
-            <a:br/>
-            <a:r>
-              <a:rPr>
-                <a:solidFill>
-                  <a:srgbClr val="4758AB"/>
-                </a:solidFill>
-                <a:latin typeface="Courier"/>
-              </a:rPr>
-              <a:t>glimpse</a:t>
-            </a:r>
-            <a:r>
-              <a:rPr>
-                <a:solidFill>
-                  <a:srgbClr val="003B4F"/>
-                </a:solidFill>
-                <a:latin typeface="Courier"/>
-              </a:rPr>
-              <a:t>(my_data_df)   </a:t>
-            </a:r>
-            <a:r>
-              <a:rPr>
-                <a:solidFill>
-                  <a:srgbClr val="5E5E5E"/>
-                </a:solidFill>
-                <a:latin typeface="Courier"/>
-              </a:rPr>
-              <a:t># column names, types, first values</a:t>
-            </a:r>
-            <a:br/>
-            <a:r>
-              <a:rPr>
-                <a:solidFill>
-                  <a:srgbClr val="4758AB"/>
-                </a:solidFill>
-                <a:latin typeface="Courier"/>
-              </a:rPr>
-              <a:t>dim</a:t>
-            </a:r>
-            <a:r>
-              <a:rPr>
-                <a:solidFill>
-                  <a:srgbClr val="003B4F"/>
-                </a:solidFill>
-                <a:latin typeface="Courier"/>
-              </a:rPr>
-              <a:t>(my_data_df)       </a:t>
-            </a:r>
-            <a:r>
-              <a:rPr>
-                <a:solidFill>
-                  <a:srgbClr val="5E5E5E"/>
-                </a:solidFill>
-                <a:latin typeface="Courier"/>
-              </a:rPr>
-              <a:t># rows x columns</a:t>
-            </a:r>
-            <a:br/>
-            <a:r>
-              <a:rPr>
-                <a:solidFill>
-                  <a:srgbClr val="4758AB"/>
-                </a:solidFill>
-                <a:latin typeface="Courier"/>
-              </a:rPr>
-              <a:t>head</a:t>
-            </a:r>
-            <a:r>
-              <a:rPr>
-                <a:solidFill>
-                  <a:srgbClr val="003B4F"/>
-                </a:solidFill>
-                <a:latin typeface="Courier"/>
-              </a:rPr>
-              <a:t>(my_data_df)      </a:t>
-            </a:r>
-            <a:r>
-              <a:rPr>
-                <a:solidFill>
-                  <a:srgbClr val="5E5E5E"/>
-                </a:solidFill>
-                <a:latin typeface="Courier"/>
-              </a:rPr>
-              <a:t># the first few rows</a:t>
-            </a:r>
-          </a:p>
-          <a:p>
-            <a:pPr lvl="0" indent="0" marL="0">
-              <a:buNone/>
-            </a:pPr>
-            <a:r>
-              <a:rPr/>
-              <a:t>✏️ </a:t>
-            </a:r>
-            <a:r>
-              <a:rPr b="1"/>
-              <a:t>Your turn:</a:t>
-            </a:r>
-            <a:r>
-              <a:rPr/>
-              <a:t> Fill in what you found.</a:t>
-            </a:r>
-          </a:p>
-          <a:p>
-            <a:pPr lvl="0" indent="0">
-              <a:buNone/>
-            </a:pPr>
+              <a:t>A </a:t>
+            </a:r>
+            <a:r>
+              <a:rPr b="1"/>
+              <a:t>short paragraph</a:t>
+            </a:r>
+            <a:r>
+              <a:rPr/>
+              <a:t> (5–8 sentences) containing:</a:t>
+            </a:r>
+          </a:p>
+          <a:p>
+            <a:pPr lvl="0" indent="-342900" marL="342900">
+              <a:buAutoNum type="arabicPeriod"/>
+            </a:pPr>
+            <a:r>
+              <a:rPr/>
+              <a:t>The </a:t>
+            </a:r>
+            <a:r>
+              <a:rPr b="1"/>
+              <a:t>name and source URL</a:t>
+            </a:r>
+            <a:r>
+              <a:rPr/>
+              <a:t> of your dataset</a:t>
+            </a:r>
+          </a:p>
+          <a:p>
+            <a:pPr lvl="0" indent="-342900" marL="342900">
+              <a:buAutoNum type="arabicPeriod"/>
+            </a:pPr>
+            <a:r>
+              <a:rPr/>
+              <a:t>How many </a:t>
+            </a:r>
+            <a:r>
+              <a:rPr b="1"/>
+              <a:t>rows and columns</a:t>
+            </a:r>
+            <a:r>
+              <a:rPr/>
+              <a:t> it has (look this up on the source website or download and </a:t>
+            </a:r>
             <a:r>
               <a:rPr>
                 <a:latin typeface="Courier"/>
               </a:rPr>
-              <a:t>Rows:                        (need at least 50 — Y / N)
-Columns:                     (need at least 3  — Y / N)
-What does ONE row represent (a day? a person? a sighting?):
-Did read_csv() load it cleanly?  Y / N — if not, what error:</a:t>
+              <a:t>glimpse()</a:t>
+            </a:r>
+            <a:r>
+              <a:rPr/>
+              <a:t>)</a:t>
+            </a:r>
+          </a:p>
+          <a:p>
+            <a:pPr lvl="0" indent="-342900" marL="342900">
+              <a:buAutoNum type="arabicPeriod"/>
+            </a:pPr>
+            <a:r>
+              <a:rPr/>
+              <a:t>The </a:t>
+            </a:r>
+            <a:r>
+              <a:rPr b="1"/>
+              <a:t>key variables</a:t>
+            </a:r>
+            <a:r>
+              <a:rPr/>
+              <a:t> you plan to use — what is your X? What is your Y?</a:t>
+            </a:r>
+          </a:p>
+          <a:p>
+            <a:pPr lvl="0" indent="-342900" marL="342900">
+              <a:buAutoNum type="arabicPeriod"/>
+            </a:pPr>
+            <a:r>
+              <a:rPr/>
+              <a:t>Your </a:t>
+            </a:r>
+            <a:r>
+              <a:rPr b="1"/>
+              <a:t>biological or scientific question</a:t>
+            </a:r>
+            <a:r>
+              <a:rPr/>
+              <a:t> in plain English</a:t>
+            </a:r>
+          </a:p>
+          <a:p>
+            <a:pPr lvl="0" indent="-342900" marL="342900">
+              <a:buAutoNum type="arabicPeriod"/>
+            </a:pPr>
+            <a:r>
+              <a:rPr/>
+              <a:t>Your </a:t>
+            </a:r>
+            <a:r>
+              <a:rPr b="1"/>
+              <a:t>null and alternate hypotheses</a:t>
+            </a:r>
+            <a:r>
+              <a:rPr/>
+              <a:t> (H₀ and Hₐ)</a:t>
+            </a:r>
+          </a:p>
+          <a:p>
+            <a:pPr lvl="0" indent="-342900" marL="342900">
+              <a:buAutoNum type="arabicPeriod"/>
+            </a:pPr>
+            <a:r>
+              <a:rPr/>
+              <a:t>Which </a:t>
+            </a:r>
+            <a:r>
+              <a:rPr b="1"/>
+              <a:t>statistical approach</a:t>
+            </a:r>
+            <a:r>
+              <a:rPr/>
+              <a:t> you think you’ll use (regression, t-test, ANOVA, or other)</a:t>
+            </a:r>
+          </a:p>
+          <a:p>
+            <a:pPr lvl="0" indent="-342900" marL="342900">
+              <a:buAutoNum type="arabicPeriod"/>
+            </a:pPr>
+            <a:r>
+              <a:rPr/>
+              <a:t>Sketch of the take home graph</a:t>
+            </a:r>
+          </a:p>
+          <a:p>
+            <a:pPr lvl="0" indent="0" marL="0">
+              <a:buNone/>
+            </a:pPr>
+            <a:r>
+              <a:rPr/>
+              <a:t>Submit as a Word file to Canvas.</a:t>
+            </a:r>
+          </a:p>
+        </p:txBody>
+      </p:sp>
+      <p:sp>
+        <p:nvSpPr>
+          <p:cNvPr id="4" name="Content Placeholder 3"/>
+          <p:cNvSpPr>
+            <a:spLocks noGrp="1"/>
+          </p:cNvSpPr>
+          <p:nvPr>
+            <p:ph idx="2" sz="half"/>
+          </p:nvPr>
+        </p:nvSpPr>
+        <p:spPr/>
+        <p:txBody>
+          <a:bodyPr/>
+          <a:lstStyle/>
+          <a:p>
+            <a:pPr lvl="0" indent="0" marL="0">
+              <a:buNone/>
+            </a:pPr>
+            <a:r>
+              <a:rPr b="1"/>
+              <a:t>Example M1 paragraph:</a:t>
+            </a:r>
+          </a:p>
+          <a:p>
+            <a:pPr lvl="0" indent="0" marL="1270000">
+              <a:buNone/>
+            </a:pPr>
+            <a:r>
+              <a:rPr sz="2000"/>
+              <a:t>“I plan to use the BFRO Bigfoot sighting dataset (kaggle.com, ~5,000 rows), which records the date, state, season, and classification of each sighting. My key variables are season (X) and sighting count (Y). My question is: do Bigfoot sightings peak in summer compared to other seasons? H₀: sighting frequency does not differ by season. Hₐ: sighting frequency differs by season. I plan to use a one-way ANOVA or chi-square test on sighting counts grouped by season.”</a:t>
+            </a:r>
+          </a:p>
+          <a:p>
+            <a:pPr lvl="0" indent="0" marL="0">
+              <a:buNone/>
+            </a:pPr>
+            <a:r>
+              <a:rPr/>
+              <a:t>One paragraph. That’s it. I’ll respond with approved / revise before M2 is due.</a:t>
             </a:r>
           </a:p>
         </p:txBody>
@@ -5551,8 +7474,8 @@
         </p:nvSpPr>
         <p:spPr>
           <a:xfrm>
-            <a:off x="0" y="0"/>
-            <a:ext cx="9144000" cy="582780"/>
+            <a:off x="139485" y="78119"/>
+            <a:ext cx="8229600" cy="607682"/>
           </a:xfrm>
         </p:spPr>
         <p:txBody>
@@ -5564,20 +7487,389 @@
             </a:pPr>
             <a:r>
               <a:rPr/>
-              <a:t>Part 5 · Identify your variables</a:t>
-            </a:r>
-          </a:p>
-        </p:txBody>
-      </p:sp>
-      <p:sp>
-        <p:nvSpPr>
-          <p:cNvPr id="3" name="Content Placeholder 2"/>
-          <p:cNvSpPr>
-            <a:spLocks noGrp="1"/>
-          </p:cNvSpPr>
+              <a:t>What Makes a Good Project Dataset?</a:t>
+            </a:r>
+          </a:p>
+        </p:txBody>
+      </p:sp>
+      <p:sp>
+        <p:nvSpPr>
+          <p:cNvPr id="3" name="Text Placeholder 2"/>
+          <p:cNvSpPr>
+            <a:spLocks noGrp="1"/>
+          </p:cNvSpPr>
+          <p:nvPr>
+            <p:ph idx="1" type="body"/>
+          </p:nvPr>
+        </p:nvSpPr>
+        <p:spPr/>
+        <p:txBody>
+          <a:bodyPr/>
+          <a:lstStyle/>
+          <a:p>
+            <a:pPr lvl="0" indent="0" marL="0">
+              <a:buNone/>
+            </a:pPr>
+            <a:r>
+              <a:rPr b="1"/>
+              <a:t>It should have:</a:t>
+            </a:r>
+          </a:p>
+          <a:p>
+            <a:pPr lvl="0"/>
+            <a:r>
+              <a:rPr/>
+              <a:t>At least </a:t>
+            </a:r>
+            <a:r>
+              <a:rPr b="1"/>
+              <a:t>50 rows</a:t>
+            </a:r>
+            <a:r>
+              <a:rPr/>
+              <a:t> (more is better — 200–2,000 is ideal for beginners)</a:t>
+            </a:r>
+          </a:p>
+          <a:p>
+            <a:pPr lvl="0"/>
+            <a:r>
+              <a:rPr/>
+              <a:t>At least one </a:t>
+            </a:r>
+            <a:r>
+              <a:rPr b="1"/>
+              <a:t>numeric response variable</a:t>
+            </a:r>
+            <a:r>
+              <a:rPr/>
+              <a:t> (the thing you want to explain)</a:t>
+            </a:r>
+          </a:p>
+          <a:p>
+            <a:pPr lvl="0"/>
+            <a:r>
+              <a:rPr/>
+              <a:t>At least one </a:t>
+            </a:r>
+            <a:r>
+              <a:rPr b="1"/>
+              <a:t>predictor</a:t>
+            </a:r>
+            <a:r>
+              <a:rPr/>
+              <a:t> — either numeric (for regression) or categorical with 2+ levels (for t-test/ANOVA)</a:t>
+            </a:r>
+          </a:p>
+          <a:p>
+            <a:pPr lvl="0"/>
+            <a:r>
+              <a:rPr/>
+              <a:t>A </a:t>
+            </a:r>
+            <a:r>
+              <a:rPr b="1"/>
+              <a:t>question you can actually answer</a:t>
+            </a:r>
+            <a:r>
+              <a:rPr/>
+              <a:t> with the methods we’ve covered</a:t>
+            </a:r>
+          </a:p>
+          <a:p>
+            <a:pPr lvl="0"/>
+            <a:r>
+              <a:rPr/>
+              <a:t>A graph and analysis you can do</a:t>
+            </a:r>
+          </a:p>
+          <a:p>
+            <a:pPr lvl="0" indent="0" marL="0">
+              <a:buNone/>
+            </a:pPr>
+            <a:r>
+              <a:rPr b="1"/>
+              <a:t>Watch out for:</a:t>
+            </a:r>
+          </a:p>
+          <a:p>
+            <a:pPr lvl="0"/>
+            <a:r>
+              <a:rPr/>
+              <a:t>Datasets with only counts or percentages (hard to do regression or ANOVA on directly)</a:t>
+            </a:r>
+          </a:p>
+          <a:p>
+            <a:pPr lvl="0"/>
+            <a:r>
+              <a:rPr/>
+              <a:t>Datasets where every row is a country or a year (too few observations)</a:t>
+            </a:r>
+          </a:p>
+          <a:p>
+            <a:pPr lvl="0"/>
+            <a:r>
+              <a:rPr/>
+              <a:t>Datasets with hundreds of columns but only 20 rows (more variables than data)</a:t>
+            </a:r>
+          </a:p>
+        </p:txBody>
+      </p:sp>
+      <p:sp>
+        <p:nvSpPr>
+          <p:cNvPr id="5" name="Text Placeholder 4"/>
+          <p:cNvSpPr>
+            <a:spLocks noGrp="1"/>
+          </p:cNvSpPr>
+          <p:nvPr>
+            <p:ph idx="3" sz="quarter" type="body"/>
+          </p:nvPr>
+        </p:nvSpPr>
+        <p:spPr/>
+        <p:txBody>
+          <a:bodyPr/>
+          <a:lstStyle/>
+          <a:p>
+            <a:pPr lvl="0" indent="0" marL="0">
+              <a:buNone/>
+            </a:pPr>
+            <a:r>
+              <a:rPr b="1"/>
+              <a:t>Good question types for this course:</a:t>
+            </a:r>
+          </a:p>
+        </p:txBody>
+      </p:sp>
+      <p:graphicFrame>
+        <p:nvGraphicFramePr>
+          <p:cNvPr id="6" name="Content Placeholder 5"/>
+          <p:cNvGraphicFramePr>
+            <a:graphicFrameLocks noGrp="1"/>
+          </p:cNvGraphicFramePr>
           <p:nvPr>
             <p:ph idx="1"/>
           </p:nvPr>
+        </p:nvGraphicFramePr>
+        <p:xfrm>
+          <a:off x="4749800" y="1295400"/>
+          <a:ext cx="4038600" cy="3276600"/>
+        </p:xfrm>
+        <a:graphic>
+          <a:graphicData uri="http://schemas.openxmlformats.org/drawingml/2006/table">
+            <a:tbl>
+              <a:tblPr firstRow="1" bandRow="1">
+                <a:tableStyleId>{5C22544A-7EE6-4342-B048-85BDC9FD1C3A}</a:tableStyleId>
+              </a:tblPr>
+              <a:tblGrid>
+                <a:gridCol w="2019300"/>
+                <a:gridCol w="2019300"/>
+              </a:tblGrid>
+              <a:tr h="0">
+                <a:tc>
+                  <a:txBody>
+                    <a:bodyPr/>
+                    <a:lstStyle/>
+                    <a:p>
+                      <a:pPr lvl="0" indent="0" marL="0">
+                        <a:buNone/>
+                      </a:pPr>
+                      <a:r>
+                        <a:rPr/>
+                        <a:t>Question</a:t>
+                      </a:r>
+                    </a:p>
+                  </a:txBody>
+                  <a:tcPr/>
+                </a:tc>
+                <a:tc>
+                  <a:txBody>
+                    <a:bodyPr/>
+                    <a:lstStyle/>
+                    <a:p>
+                      <a:pPr lvl="0" indent="0" marL="0">
+                        <a:buNone/>
+                      </a:pPr>
+                      <a:r>
+                        <a:rPr/>
+                        <a:t>Method</a:t>
+                      </a:r>
+                    </a:p>
+                  </a:txBody>
+                  <a:tcPr/>
+                </a:tc>
+              </a:tr>
+              <a:tr h="0">
+                <a:tc>
+                  <a:txBody>
+                    <a:bodyPr/>
+                    <a:lstStyle/>
+                    <a:p>
+                      <a:pPr lvl="0" indent="0" marL="0">
+                        <a:buNone/>
+                      </a:pPr>
+                      <a:r>
+                        <a:rPr/>
+                        <a:t>Does Y increase with X?</a:t>
+                      </a:r>
+                    </a:p>
+                  </a:txBody>
+                </a:tc>
+                <a:tc>
+                  <a:txBody>
+                    <a:bodyPr/>
+                    <a:lstStyle/>
+                    <a:p>
+                      <a:pPr lvl="0" indent="0" marL="0">
+                        <a:buNone/>
+                      </a:pPr>
+                      <a:r>
+                        <a:rPr/>
+                        <a:t>Regression</a:t>
+                      </a:r>
+                    </a:p>
+                  </a:txBody>
+                </a:tc>
+              </a:tr>
+              <a:tr h="0">
+                <a:tc>
+                  <a:txBody>
+                    <a:bodyPr/>
+                    <a:lstStyle/>
+                    <a:p>
+                      <a:pPr lvl="0" indent="0" marL="0">
+                        <a:buNone/>
+                      </a:pPr>
+                      <a:r>
+                        <a:rPr/>
+                        <a:t>Does group A differ from group B on Y?</a:t>
+                      </a:r>
+                    </a:p>
+                  </a:txBody>
+                </a:tc>
+                <a:tc>
+                  <a:txBody>
+                    <a:bodyPr/>
+                    <a:lstStyle/>
+                    <a:p>
+                      <a:pPr lvl="0" indent="0" marL="0">
+                        <a:buNone/>
+                      </a:pPr>
+                      <a:r>
+                        <a:rPr/>
+                        <a:t>t-test</a:t>
+                      </a:r>
+                    </a:p>
+                  </a:txBody>
+                </a:tc>
+              </a:tr>
+              <a:tr h="0">
+                <a:tc>
+                  <a:txBody>
+                    <a:bodyPr/>
+                    <a:lstStyle/>
+                    <a:p>
+                      <a:pPr lvl="0" indent="0" marL="0">
+                        <a:buNone/>
+                      </a:pPr>
+                      <a:r>
+                        <a:rPr/>
+                        <a:t>Does Y differ across 3+ groups?</a:t>
+                      </a:r>
+                    </a:p>
+                  </a:txBody>
+                </a:tc>
+                <a:tc>
+                  <a:txBody>
+                    <a:bodyPr/>
+                    <a:lstStyle/>
+                    <a:p>
+                      <a:pPr lvl="0" indent="0" marL="0">
+                        <a:buNone/>
+                      </a:pPr>
+                      <a:r>
+                        <a:rPr/>
+                        <a:t>ANOVA</a:t>
+                      </a:r>
+                    </a:p>
+                  </a:txBody>
+                </a:tc>
+              </a:tr>
+              <a:tr h="0">
+                <a:tc>
+                  <a:txBody>
+                    <a:bodyPr/>
+                    <a:lstStyle/>
+                    <a:p>
+                      <a:pPr lvl="0" indent="0" marL="0">
+                        <a:buNone/>
+                      </a:pPr>
+                      <a:r>
+                        <a:rPr/>
+                        <a:t>Does Y change over time?</a:t>
+                      </a:r>
+                    </a:p>
+                  </a:txBody>
+                </a:tc>
+                <a:tc>
+                  <a:txBody>
+                    <a:bodyPr/>
+                    <a:lstStyle/>
+                    <a:p>
+                      <a:pPr lvl="0" indent="0" marL="0">
+                        <a:buNone/>
+                      </a:pPr>
+                      <a:r>
+                        <a:rPr/>
+                        <a:t>Regression on year</a:t>
+                      </a:r>
+                    </a:p>
+                  </a:txBody>
+                </a:tc>
+              </a:tr>
+              <a:tr h="0">
+                <a:tc>
+                  <a:txBody>
+                    <a:bodyPr/>
+                    <a:lstStyle/>
+                    <a:p>
+                      <a:pPr lvl="0" indent="0" marL="0">
+                        <a:buNone/>
+                      </a:pPr>
+                      <a:r>
+                        <a:rPr/>
+                        <a:t>How does Y depend on both X and group?</a:t>
+                      </a:r>
+                    </a:p>
+                  </a:txBody>
+                </a:tc>
+                <a:tc>
+                  <a:txBody>
+                    <a:bodyPr/>
+                    <a:lstStyle/>
+                    <a:p>
+                      <a:pPr lvl="0" indent="0" marL="0">
+                        <a:buNone/>
+                      </a:pPr>
+                      <a:r>
+                        <a:rPr/>
+                        <a:t>ANCOVA (optional)</a:t>
+                      </a:r>
+                    </a:p>
+                  </a:txBody>
+                </a:tc>
+              </a:tr>
+            </a:tbl>
+          </a:graphicData>
+        </a:graphic>
+      </p:graphicFrame>
+      <p:sp>
+        <p:nvSpPr>
+          <p:cNvPr id="6" name="Content Placeholder 5"/>
+          <p:cNvSpPr>
+            <a:spLocks noGrp="1"/>
+          </p:cNvSpPr>
+          <p:nvPr>
+            <p:ph idx="4" sz="quarter"/>
+          </p:nvPr>
         </p:nvSpPr>
         <p:spPr/>
         <p:txBody>
@@ -5589,242 +7881,7 @@
             </a:pPr>
             <a:r>
               <a:rPr/>
-              <a:t>Look at the </a:t>
-            </a:r>
-            <a:r>
-              <a:rPr>
-                <a:latin typeface="Courier"/>
-              </a:rPr>
-              <a:t>glimpse()</a:t>
-            </a:r>
-            <a:r>
-              <a:rPr/>
-              <a:t> output. Column types tell you their role: </a:t>
-            </a:r>
-            <a:r>
-              <a:rPr>
-                <a:latin typeface="Courier"/>
-              </a:rPr>
-              <a:t>&lt;dbl&gt;</a:t>
-            </a:r>
-            <a:r>
-              <a:rPr/>
-              <a:t>/</a:t>
-            </a:r>
-            <a:r>
-              <a:rPr>
-                <a:latin typeface="Courier"/>
-              </a:rPr>
-              <a:t>&lt;int&gt;</a:t>
-            </a:r>
-            <a:r>
-              <a:rPr/>
-              <a:t> are numeric (possible </a:t>
-            </a:r>
-            <a:r>
-              <a:rPr b="1"/>
-              <a:t>Y</a:t>
-            </a:r>
-            <a:r>
-              <a:rPr/>
-              <a:t>), </a:t>
-            </a:r>
-            <a:r>
-              <a:rPr>
-                <a:latin typeface="Courier"/>
-              </a:rPr>
-              <a:t>&lt;chr&gt;</a:t>
-            </a:r>
-            <a:r>
-              <a:rPr/>
-              <a:t>/</a:t>
-            </a:r>
-            <a:r>
-              <a:rPr>
-                <a:latin typeface="Courier"/>
-              </a:rPr>
-              <a:t>&lt;fct&gt;</a:t>
-            </a:r>
-            <a:r>
-              <a:rPr/>
-              <a:t> are categorical (possible grouping </a:t>
-            </a:r>
-            <a:r>
-              <a:rPr b="1"/>
-              <a:t>X</a:t>
-            </a:r>
-            <a:r>
-              <a:rPr/>
-              <a:t>).</a:t>
-            </a:r>
-          </a:p>
-          <a:p>
-            <a:pPr lvl="0" indent="0" marL="0">
-              <a:buNone/>
-            </a:pPr>
-            <a:r>
-              <a:rPr/>
-              <a:t>✏️ </a:t>
-            </a:r>
-            <a:r>
-              <a:rPr b="1"/>
-              <a:t>Your turn:</a:t>
-            </a:r>
-            <a:r>
-              <a:rPr/>
-              <a:t> Choose your variables.</a:t>
-            </a:r>
-          </a:p>
-          <a:p>
-            <a:pPr lvl="0" indent="0">
-              <a:buNone/>
-            </a:pPr>
-            <a:r>
-              <a:rPr>
-                <a:latin typeface="Courier"/>
-              </a:rPr>
-              <a:t>Response variable Y (numeric — the thing you want to explain):
-Its type (&lt;dbl&gt; / &lt;int&gt;):
-Predictor variable X:
-Its type (numeric / categorical):
-If categorical, how many groups does it have?</a:t>
-            </a:r>
-          </a:p>
-          <a:p>
-            <a:pPr lvl="0" indent="0" marL="0">
-              <a:buNone/>
-            </a:pPr>
-            <a:r>
-              <a:rPr/>
-              <a:t>✏️ </a:t>
-            </a:r>
-            <a:r>
-              <a:rPr b="1"/>
-              <a:t>Your turn:</a:t>
-            </a:r>
-            <a:r>
-              <a:rPr/>
-              <a:t> Any missing values to worry about? (Look for </a:t>
-            </a:r>
-            <a:r>
-              <a:rPr>
-                <a:latin typeface="Courier"/>
-              </a:rPr>
-              <a:t>NA</a:t>
-            </a:r>
-            <a:r>
-              <a:rPr/>
-              <a:t> in </a:t>
-            </a:r>
-            <a:r>
-              <a:rPr>
-                <a:latin typeface="Courier"/>
-              </a:rPr>
-              <a:t>glimpse()</a:t>
-            </a:r>
-            <a:r>
-              <a:rPr/>
-              <a:t>/</a:t>
-            </a:r>
-            <a:r>
-              <a:rPr>
-                <a:latin typeface="Courier"/>
-              </a:rPr>
-              <a:t>head()</a:t>
-            </a:r>
-            <a:r>
-              <a:rPr/>
-              <a:t>, or count them.)</a:t>
-            </a:r>
-          </a:p>
-          <a:p>
-            <a:pPr lvl="0" indent="0" marL="0">
-              <a:buNone/>
-            </a:pPr>
-            <a:r>
-              <a:rPr b="1"/>
-              <a:t>▶ Adapt this:</a:t>
-            </a:r>
-          </a:p>
-          <a:p>
-            <a:pPr lvl="0" indent="0">
-              <a:buNone/>
-            </a:pPr>
-            <a:r>
-              <a:rPr>
-                <a:solidFill>
-                  <a:srgbClr val="5E5E5E"/>
-                </a:solidFill>
-                <a:latin typeface="Courier"/>
-              </a:rPr>
-              <a:t># Count missing values in your Y column ------------------</a:t>
-            </a:r>
-            <a:br/>
-            <a:r>
-              <a:rPr>
-                <a:solidFill>
-                  <a:srgbClr val="4758AB"/>
-                </a:solidFill>
-                <a:latin typeface="Courier"/>
-              </a:rPr>
-              <a:t>sum</a:t>
-            </a:r>
-            <a:r>
-              <a:rPr>
-                <a:solidFill>
-                  <a:srgbClr val="003B4F"/>
-                </a:solidFill>
-                <a:latin typeface="Courier"/>
-              </a:rPr>
-              <a:t>(</a:t>
-            </a:r>
-            <a:r>
-              <a:rPr>
-                <a:solidFill>
-                  <a:srgbClr val="4758AB"/>
-                </a:solidFill>
-                <a:latin typeface="Courier"/>
-              </a:rPr>
-              <a:t>is.na</a:t>
-            </a:r>
-            <a:r>
-              <a:rPr>
-                <a:solidFill>
-                  <a:srgbClr val="003B4F"/>
-                </a:solidFill>
-                <a:latin typeface="Courier"/>
-              </a:rPr>
-              <a:t>(my_data_df</a:t>
-            </a:r>
-            <a:r>
-              <a:rPr>
-                <a:solidFill>
-                  <a:srgbClr val="5E5E5E"/>
-                </a:solidFill>
-                <a:latin typeface="Courier"/>
-              </a:rPr>
-              <a:t>$</a:t>
-            </a:r>
-            <a:r>
-              <a:rPr>
-                <a:solidFill>
-                  <a:srgbClr val="003B4F"/>
-                </a:solidFill>
-                <a:latin typeface="Courier"/>
-              </a:rPr>
-              <a:t>your_Y_column))</a:t>
-            </a:r>
-          </a:p>
-          <a:p>
-            <a:pPr lvl="0" indent="0">
-              <a:buNone/>
-            </a:pPr>
-            <a:r>
-              <a:rPr>
-                <a:latin typeface="Courier"/>
-              </a:rPr>
-              <a:t>Missing values in Y:
-Will this be a problem?  (remember na.rm = TRUE and sum(!is.na()))</a:t>
+              <a:t>Any of these — applied to data you find interesting — is a valid project.</a:t>
             </a:r>
           </a:p>
         </p:txBody>
@@ -5864,8 +7921,11 @@
         <p:spPr>
           <a:xfrm>
             <a:off x="0" y="0"/>
-            <a:ext cx="9144000" cy="582780"/>
+            <a:ext cx="9144000" cy="602780"/>
           </a:xfrm>
+          <a:solidFill>
+            <a:srgbClr val="1A1A2E"/>
+          </a:solidFill>
         </p:spPr>
         <p:txBody>
           <a:bodyPr/>
@@ -5876,7 +7936,7 @@
             </a:pPr>
             <a:r>
               <a:rPr/>
-              <a:t>Part 6 · Write a testable question</a:t>
+              <a:t>Data Sources: Ecology and Environmental Science</a:t>
             </a:r>
           </a:p>
         </p:txBody>
@@ -5888,7 +7948,7 @@
             <a:spLocks noGrp="1"/>
           </p:cNvSpPr>
           <p:nvPr>
-            <p:ph idx="1"/>
+            <p:ph idx="1" sz="half"/>
           </p:nvPr>
         </p:nvSpPr>
         <p:spPr/>
@@ -5900,63 +7960,208 @@
               <a:buNone/>
             </a:pPr>
             <a:r>
-              <a:rPr/>
-              <a:t>A question is testable when you can write H₀ and Hₐ in one sentence each.</a:t>
-            </a:r>
-          </a:p>
-          <a:p>
-            <a:pPr lvl="0" indent="0" marL="0">
-              <a:buNone/>
-            </a:pPr>
-            <a:r>
-              <a:rPr/>
-              <a:t>✏️ </a:t>
-            </a:r>
-            <a:r>
-              <a:rPr b="1"/>
-              <a:t>Your turn:</a:t>
-            </a:r>
-          </a:p>
-          <a:p>
-            <a:pPr lvl="0" indent="0">
-              <a:buNone/>
-            </a:pPr>
+              <a:rPr b="1"/>
+              <a:t>These are peer-reviewed and citable — great for biology-related questions:</a:t>
+            </a:r>
+          </a:p>
+          <a:p>
+            <a:pPr lvl="0"/>
+            <a:r>
+              <a:rPr/>
+              <a:t>🌿 </a:t>
+            </a:r>
+            <a:r>
+              <a:rPr b="1"/>
+              <a:t>GBIF</a:t>
+            </a:r>
+            <a:r>
+              <a:rPr/>
+              <a:t> — Global Biodiversity Information Facility</a:t>
+            </a:r>
+            <a:br/>
+            <a:r>
+              <a:rPr/>
+              <a:t>Species occurrence records worldwide, 2+ billion observations</a:t>
+            </a:r>
+            <a:br/>
             <a:r>
               <a:rPr>
                 <a:latin typeface="Courier"/>
               </a:rPr>
-              <a:t>Question in plain English:
-H₀ (null):
-Hₐ (alternate):</a:t>
-            </a:r>
-          </a:p>
-          <a:p>
-            <a:pPr lvl="0" indent="0" marL="0">
-              <a:buNone/>
-            </a:pPr>
-            <a:r>
-              <a:rPr/>
-              <a:t>✏️ </a:t>
-            </a:r>
-            <a:r>
-              <a:rPr b="1"/>
-              <a:t>Your turn:</a:t>
-            </a:r>
-            <a:r>
-              <a:rPr/>
-              <a:t> Match your question to a method (circle one) and say why.</a:t>
-            </a:r>
-          </a:p>
-          <a:p>
-            <a:pPr lvl="0" indent="0">
-              <a:buNone/>
-            </a:pPr>
+              <a:t>gbif.org</a:t>
+            </a:r>
+            <a:r>
+              <a:rPr/>
+              <a:t> — download by species, region, or date range</a:t>
+            </a:r>
+          </a:p>
+          <a:p>
+            <a:pPr lvl="0"/>
+            <a:r>
+              <a:rPr/>
+              <a:t>🌊 </a:t>
+            </a:r>
+            <a:r>
+              <a:rPr b="1"/>
+              <a:t>EDI Repository</a:t>
+            </a:r>
+            <a:r>
+              <a:rPr/>
+              <a:t> — Environmental Data Initiative</a:t>
+            </a:r>
+            <a:br/>
+            <a:r>
+              <a:rPr/>
+              <a:t>Long-term ecology datasets, many already tidy</a:t>
+            </a:r>
+            <a:br/>
             <a:r>
               <a:rPr>
                 <a:latin typeface="Courier"/>
               </a:rPr>
-              <a:t>Method:  regression  /  t-test  /  ANOVA  /  regression on year
-Why this method fits my X and Y:</a:t>
+              <a:t>edirepository.org</a:t>
+            </a:r>
+          </a:p>
+          <a:p>
+            <a:pPr lvl="0"/>
+            <a:r>
+              <a:rPr/>
+              <a:t>🌱 </a:t>
+            </a:r>
+            <a:r>
+              <a:rPr b="1"/>
+              <a:t>NEON</a:t>
+            </a:r>
+            <a:r>
+              <a:rPr/>
+              <a:t> — National Ecological Observatory Network</a:t>
+            </a:r>
+            <a:br/>
+            <a:r>
+              <a:rPr/>
+              <a:t>Standardized ecological data across 81 US sites</a:t>
+            </a:r>
+            <a:br/>
+            <a:r>
+              <a:rPr>
+                <a:latin typeface="Courier"/>
+              </a:rPr>
+              <a:t>data.neonscience.org</a:t>
+            </a:r>
+          </a:p>
+          <a:p>
+            <a:pPr lvl="0"/>
+            <a:r>
+              <a:rPr/>
+              <a:t>📦 </a:t>
+            </a:r>
+            <a:r>
+              <a:rPr b="1"/>
+              <a:t>Dryad</a:t>
+            </a:r>
+            <a:r>
+              <a:rPr/>
+              <a:t> — data behind published papers</a:t>
+            </a:r>
+            <a:br/>
+            <a:r>
+              <a:rPr/>
+              <a:t>Every dataset comes with a real paper you can cite</a:t>
+            </a:r>
+            <a:br/>
+            <a:r>
+              <a:rPr>
+                <a:latin typeface="Courier"/>
+              </a:rPr>
+              <a:t>datadryad.org</a:t>
+            </a:r>
+          </a:p>
+          <a:p>
+            <a:pPr lvl="0"/>
+            <a:r>
+              <a:rPr/>
+              <a:t>🔬 </a:t>
+            </a:r>
+            <a:r>
+              <a:rPr b="1"/>
+              <a:t>Zenodo</a:t>
+            </a:r>
+            <a:r>
+              <a:rPr/>
+              <a:t> — open research data from labs worldwide</a:t>
+            </a:r>
+            <a:br/>
+            <a:r>
+              <a:rPr>
+                <a:latin typeface="Courier"/>
+              </a:rPr>
+              <a:t>zenodo.org</a:t>
+            </a:r>
+          </a:p>
+          <a:p>
+            <a:pPr lvl="0"/>
+            <a:r>
+              <a:rPr/>
+              <a:t>Figshare - </a:t>
+            </a:r>
+            <a:r>
+              <a:rPr>
+                <a:hlinkClick r:id="rId2"/>
+              </a:rPr>
+              <a:t>https://figshare.com/</a:t>
+            </a:r>
+          </a:p>
+        </p:txBody>
+      </p:sp>
+      <p:sp>
+        <p:nvSpPr>
+          <p:cNvPr id="4" name="Content Placeholder 3"/>
+          <p:cNvSpPr>
+            <a:spLocks noGrp="1"/>
+          </p:cNvSpPr>
+          <p:nvPr>
+            <p:ph idx="2" sz="half"/>
+          </p:nvPr>
+        </p:nvSpPr>
+        <p:spPr/>
+        <p:txBody>
+          <a:bodyPr/>
+          <a:lstStyle/>
+          <a:p>
+            <a:pPr lvl="0" indent="0" marL="0">
+              <a:buNone/>
+            </a:pPr>
+            <a:r>
+              <a:rPr b="1"/>
+              <a:t>Good for regression or ANOVA questions like:</a:t>
+            </a:r>
+          </a:p>
+          <a:p>
+            <a:pPr lvl="0"/>
+            <a:r>
+              <a:rPr/>
+              <a:t>Does plant height differ between disturbed and undisturbed sites?</a:t>
+            </a:r>
+          </a:p>
+          <a:p>
+            <a:pPr lvl="0"/>
+            <a:r>
+              <a:rPr/>
+              <a:t>Does bird species richness decrease with latitude?</a:t>
+            </a:r>
+          </a:p>
+          <a:p>
+            <a:pPr lvl="0"/>
+            <a:r>
+              <a:rPr/>
+              <a:t>Has the first flowering date of a species shifted over time?</a:t>
+            </a:r>
+          </a:p>
+          <a:p>
+            <a:pPr lvl="0"/>
+            <a:r>
+              <a:rPr/>
+              <a:t>Is fish abundance correlated with water temperature?</a:t>
             </a:r>
           </a:p>
           <a:p>
@@ -5964,16 +8169,17 @@
               <a:buNone/>
             </a:pPr>
             <a:r>
+              <a:rPr sz="2000" b="1"/>
+              <a:t>Tip</a:t>
+            </a:r>
+          </a:p>
+          <a:p>
+            <a:pPr lvl="0" indent="0" marL="1270000">
+              <a:buNone/>
+            </a:pPr>
+            <a:r>
               <a:rPr sz="2000"/>
-              <a:t>💡 </a:t>
-            </a:r>
-            <a:r>
-              <a:rPr sz="2000" b="1"/>
-              <a:t>Key idea:</a:t>
-            </a:r>
-            <a:r>
-              <a:rPr sz="2000"/>
-              <a:t> numeric X → regression; categorical X with 2 groups → t-test; categorical X with 3+ groups → ANOVA; time on the x-axis → regression on year.</a:t>
+              <a:t>NEON and EDI data are especially good — they’re already in tidy, well-documented CSV format and many come with R vignettes.</a:t>
             </a:r>
           </a:p>
         </p:txBody>
@@ -6013,8 +8219,11 @@
         <p:spPr>
           <a:xfrm>
             <a:off x="0" y="0"/>
-            <a:ext cx="9144000" cy="582780"/>
+            <a:ext cx="9144000" cy="602780"/>
           </a:xfrm>
+          <a:solidFill>
+            <a:srgbClr val="1A1A2E"/>
+          </a:solidFill>
         </p:spPr>
         <p:txBody>
           <a:bodyPr/>
@@ -6025,7 +8234,7 @@
             </a:pPr>
             <a:r>
               <a:rPr/>
-              <a:t>Part 7 · Sketch your take-home graph</a:t>
+              <a:t>Data Sources: Ecology and Environmental Science (cont.)</a:t>
             </a:r>
           </a:p>
         </p:txBody>
@@ -6037,7 +8246,7 @@
             <a:spLocks noGrp="1"/>
           </p:cNvSpPr>
           <p:nvPr>
-            <p:ph idx="1"/>
+            <p:ph idx="1" sz="half"/>
           </p:nvPr>
         </p:nvSpPr>
         <p:spPr/>
@@ -6045,50 +8254,241 @@
           <a:bodyPr/>
           <a:lstStyle/>
           <a:p>
-            <a:pPr lvl="0" indent="0" marL="0">
-              <a:buNone/>
-            </a:pPr>
-            <a:r>
-              <a:rPr/>
-              <a:t>Before any analysis, draw the plot you </a:t>
-            </a:r>
-            <a:r>
-              <a:rPr i="1"/>
-              <a:t>hope</a:t>
-            </a:r>
-            <a:r>
-              <a:rPr/>
-              <a:t> to make. This is your target — the single figure that would answer your question.</a:t>
-            </a:r>
-          </a:p>
-          <a:p>
-            <a:pPr lvl="0" indent="0" marL="0">
-              <a:buNone/>
-            </a:pPr>
-            <a:r>
-              <a:rPr/>
-              <a:t>✏️ </a:t>
-            </a:r>
-            <a:r>
-              <a:rPr b="1"/>
-              <a:t>Your turn:</a:t>
-            </a:r>
-            <a:r>
-              <a:rPr/>
-              <a:t> Sketch it (by hand is fine) and label the axes.</a:t>
-            </a:r>
-          </a:p>
-          <a:p>
-            <a:pPr lvl="0" indent="0">
-              <a:buNone/>
-            </a:pPr>
+            <a:pPr lvl="0"/>
+            <a:r>
+              <a:rPr/>
+              <a:t>🧊 </a:t>
+            </a:r>
+            <a:r>
+              <a:rPr b="1"/>
+              <a:t>NOAA-GLERL Great Lakes Ice</a:t>
+            </a:r>
+            <a:br/>
+            <a:r>
+              <a:rPr/>
+              <a:t>Daily ice cover for all five lakes back to 1973</a:t>
+            </a:r>
+            <a:br/>
             <a:r>
               <a:rPr>
                 <a:latin typeface="Courier"/>
               </a:rPr>
-              <a:t>What's on the x-axis:
-What's on the y-axis:
-What pattern would support Hₐ (a slope? a group difference?):</a:t>
+              <a:t>glerl.noaa.gov/data/ice</a:t>
+            </a:r>
+            <a:br/>
+            <a:r>
+              <a:rPr i="1"/>
+              <a:t>Great Lakes Superior, Michigan, Huron, Erie, Ontario — each a different story</a:t>
+            </a:r>
+          </a:p>
+          <a:p>
+            <a:pPr lvl="0"/>
+            <a:r>
+              <a:rPr/>
+              <a:t>🐟 </a:t>
+            </a:r>
+            <a:r>
+              <a:rPr b="1"/>
+              <a:t>LTER Network</a:t>
+            </a:r>
+            <a:r>
+              <a:rPr/>
+              <a:t> — Long Term Ecological Research</a:t>
+            </a:r>
+            <a:br/>
+            <a:r>
+              <a:rPr/>
+              <a:t>Fish, invertebrate, and plankton counts from dozens of sites</a:t>
+            </a:r>
+            <a:br/>
+            <a:r>
+              <a:rPr>
+                <a:latin typeface="Courier"/>
+              </a:rPr>
+              <a:t>lternet.edu/data</a:t>
+            </a:r>
+            <a:r>
+              <a:rPr/>
+              <a:t> — see also </a:t>
+            </a:r>
+            <a:r>
+              <a:rPr>
+                <a:hlinkClick r:id="rId2"/>
+              </a:rPr>
+              <a:t>https://lternet.edu/using-lter-data/</a:t>
+            </a:r>
+          </a:p>
+          <a:p>
+            <a:pPr lvl="0"/>
+            <a:r>
+              <a:rPr/>
+              <a:t>🌡️ </a:t>
+            </a:r>
+            <a:r>
+              <a:rPr b="1"/>
+              <a:t>Berkeley Earth</a:t>
+            </a:r>
+            <a:br/>
+            <a:r>
+              <a:rPr/>
+              <a:t>Global land temperature anomalies by country and city</a:t>
+            </a:r>
+            <a:br/>
+            <a:r>
+              <a:rPr>
+                <a:latin typeface="Courier"/>
+              </a:rPr>
+              <a:t>berkeleyearth.org/data</a:t>
+            </a:r>
+          </a:p>
+          <a:p>
+            <a:pPr lvl="0"/>
+            <a:r>
+              <a:rPr/>
+              <a:t>🐦 </a:t>
+            </a:r>
+            <a:r>
+              <a:rPr b="1"/>
+              <a:t>eBird</a:t>
+            </a:r>
+            <a:r>
+              <a:rPr/>
+              <a:t> — Cornell Lab of Ornithology</a:t>
+            </a:r>
+            <a:br/>
+            <a:r>
+              <a:rPr/>
+              <a:t>500M+ bird observation records globally</a:t>
+            </a:r>
+            <a:br/>
+            <a:r>
+              <a:rPr>
+                <a:latin typeface="Courier"/>
+              </a:rPr>
+              <a:t>ebird.org/science/use-ebird-data</a:t>
+            </a:r>
+          </a:p>
+        </p:txBody>
+      </p:sp>
+      <p:sp>
+        <p:nvSpPr>
+          <p:cNvPr id="4" name="Content Placeholder 3"/>
+          <p:cNvSpPr>
+            <a:spLocks noGrp="1"/>
+          </p:cNvSpPr>
+          <p:nvPr>
+            <p:ph idx="2" sz="half"/>
+          </p:nvPr>
+        </p:nvSpPr>
+        <p:spPr/>
+        <p:txBody>
+          <a:bodyPr/>
+          <a:lstStyle/>
+          <a:p>
+            <a:pPr lvl="0" indent="0" marL="0">
+              <a:buNone/>
+            </a:pPr>
+            <a:r>
+              <a:rPr b="1"/>
+              <a:t>The Great Lakes ice option in particular:</a:t>
+            </a:r>
+          </a:p>
+          <a:p>
+            <a:pPr lvl="0" indent="0" marL="0">
+              <a:buNone/>
+            </a:pPr>
+            <a:r>
+              <a:rPr/>
+              <a:t>You already know how to load and pivot </a:t>
+            </a:r>
+            <a:r>
+              <a:rPr>
+                <a:latin typeface="Courier"/>
+              </a:rPr>
+              <a:t>sup.txt</a:t>
+            </a:r>
+            <a:r>
+              <a:rPr/>
+              <a:t> — the exact same code works for </a:t>
+            </a:r>
+            <a:r>
+              <a:rPr>
+                <a:latin typeface="Courier"/>
+              </a:rPr>
+              <a:t>mic.txt</a:t>
+            </a:r>
+            <a:r>
+              <a:rPr/>
+              <a:t>, </a:t>
+            </a:r>
+            <a:r>
+              <a:rPr>
+                <a:latin typeface="Courier"/>
+              </a:rPr>
+              <a:t>hur.txt</a:t>
+            </a:r>
+            <a:r>
+              <a:rPr/>
+              <a:t>, </a:t>
+            </a:r>
+            <a:r>
+              <a:rPr>
+                <a:latin typeface="Courier"/>
+              </a:rPr>
+              <a:t>eri.txt</a:t>
+            </a:r>
+            <a:r>
+              <a:rPr/>
+              <a:t>, and </a:t>
+            </a:r>
+            <a:r>
+              <a:rPr>
+                <a:latin typeface="Courier"/>
+              </a:rPr>
+              <a:t>ont.txt</a:t>
+            </a:r>
+            <a:r>
+              <a:rPr/>
+              <a:t>.</a:t>
+            </a:r>
+          </a:p>
+          <a:p>
+            <a:pPr lvl="0" indent="0" marL="0">
+              <a:buNone/>
+            </a:pPr>
+            <a:r>
+              <a:rPr/>
+              <a:t>Possible questions:</a:t>
+            </a:r>
+          </a:p>
+          <a:p>
+            <a:pPr lvl="0"/>
+            <a:r>
+              <a:rPr/>
+              <a:t>Does Lake Erie lose more ice per decade than Lake Superior?</a:t>
+            </a:r>
+          </a:p>
+          <a:p>
+            <a:pPr lvl="0"/>
+            <a:r>
+              <a:rPr/>
+              <a:t>Which lake shows the strongest trend in maximum ice cover?</a:t>
+            </a:r>
+          </a:p>
+          <a:p>
+            <a:pPr lvl="0"/>
+            <a:r>
+              <a:rPr/>
+              <a:t>Has the timing of peak ice changed since 1973?</a:t>
+            </a:r>
+          </a:p>
+          <a:p>
+            <a:pPr lvl="0" indent="0" marL="0">
+              <a:buNone/>
+            </a:pPr>
+            <a:r>
+              <a:rPr/>
+              <a:t>This is a low-barrier entry since the hard code work is already done.</a:t>
             </a:r>
           </a:p>
         </p:txBody>

--- a/docs/content/final_project/final_project_lecture.pptx
+++ b/docs/content/final_project/final_project_lecture.pptx
@@ -3357,7 +3357,7 @@
             </a:pPr>
             <a:r>
               <a:rPr/>
-              <a:t>2026-08-27</a:t>
+              <a:t>2026-09-01</a:t>
             </a:r>
           </a:p>
         </p:txBody>

--- a/docs/content/final_project/final_project_lecture.pptx
+++ b/docs/content/final_project/final_project_lecture.pptx
@@ -3357,7 +3357,7 @@
             </a:pPr>
             <a:r>
               <a:rPr/>
-              <a:t>2026-09-01</a:t>
+              <a:t>2026-09-03</a:t>
             </a:r>
           </a:p>
         </p:txBody>

--- a/docs/content/final_project/final_project_lecture.pptx
+++ b/docs/content/final_project/final_project_lecture.pptx
@@ -3357,7 +3357,7 @@
             </a:pPr>
             <a:r>
               <a:rPr/>
-              <a:t>2026-09-03</a:t>
+              <a:t>2026-09-04</a:t>
             </a:r>
           </a:p>
         </p:txBody>
